--- a/長億南園8樓/長億南園8樓_房仲向屋主議價溝通簡報.pptx
+++ b/長億南園8樓/長億南園8樓_房仲向屋主議價溝通簡報.pptx
@@ -3146,57 +3146,14 @@
       </p:sp>
       <p:sp>
         <p:nvSpPr>
-          <p:cNvPr id="3" name="Rectangle 2"/>
-          <p:cNvSpPr/>
-          <p:nvPr/>
-        </p:nvSpPr>
-        <p:spPr>
-          <a:xfrm>
-            <a:off x="731520" y="1645920"/>
-            <a:ext cx="137160" cy="2926080"/>
-          </a:xfrm>
-          <a:prstGeom prst="rect">
-            <a:avLst/>
-          </a:prstGeom>
-          <a:solidFill>
-            <a:srgbClr val="D98C14"/>
-          </a:solidFill>
-          <a:ln>
-            <a:noFill/>
-          </a:ln>
-        </p:spPr>
-        <p:style>
-          <a:lnRef idx="1">
-            <a:schemeClr val="accent1"/>
-          </a:lnRef>
-          <a:fillRef idx="3">
-            <a:schemeClr val="accent1"/>
-          </a:fillRef>
-          <a:effectRef idx="2">
-            <a:schemeClr val="accent1"/>
-          </a:effectRef>
-          <a:fontRef idx="minor">
-            <a:schemeClr val="lt1"/>
-          </a:fontRef>
-        </p:style>
-        <p:txBody>
-          <a:bodyPr rtlCol="0" anchor="ctr"/>
-          <a:lstStyle/>
-          <a:p>
-            <a:pPr algn="ctr"/>
-          </a:p>
-        </p:txBody>
-      </p:sp>
-      <p:sp>
-        <p:nvSpPr>
-          <p:cNvPr id="4" name="TextBox 3"/>
+          <p:cNvPr id="3" name="TextBox 2"/>
           <p:cNvSpPr txBox="1"/>
           <p:nvPr/>
         </p:nvSpPr>
         <p:spPr>
           <a:xfrm>
-            <a:off x="1097280" y="1463040"/>
-            <a:ext cx="10058400" cy="3200400"/>
+            <a:off x="914400" y="1645920"/>
+            <a:ext cx="10362895" cy="3657600"/>
           </a:xfrm>
           <a:prstGeom prst="rect">
             <a:avLst/>
@@ -3210,7 +3167,7 @@
           <a:lstStyle/>
           <a:p>
             <a:pPr>
-              <a:defRPr sz="2400" b="1">
+              <a:defRPr sz="2200" b="1">
                 <a:solidFill>
                   <a:srgbClr val="D98C14"/>
                 </a:solidFill>
@@ -3226,7 +3183,7 @@
               <a:spcBef>
                 <a:spcPts val="800"/>
               </a:spcBef>
-              <a:defRPr sz="3400" b="1">
+              <a:defRPr sz="3600" b="1">
                 <a:solidFill>
                   <a:srgbClr val="FFFFFF"/>
                 </a:solidFill>
@@ -3240,11 +3197,11 @@
           <a:p>
             <a:pPr>
               <a:spcBef>
-                <a:spcPts val="1200"/>
+                <a:spcPts val="1400"/>
               </a:spcBef>
-              <a:defRPr sz="1400">
-                <a:solidFill>
-                  <a:srgbClr val="BED2F0"/>
+              <a:defRPr sz="1500">
+                <a:solidFill>
+                  <a:srgbClr val="C8D7EB"/>
                 </a:solidFill>
                 <a:latin typeface="微軟正黑體"/>
               </a:defRPr>
@@ -3253,53 +3210,14 @@
               <a:t>【市場大盤反轉急凍・同社區4戶競售剖析・南屯大墩人文競品威脅・掌握稀缺中年自住買盤】</a:t>
             </a:r>
           </a:p>
-        </p:txBody>
-      </p:sp>
-      <p:sp>
-        <p:nvSpPr>
-          <p:cNvPr id="5" name="Rounded Rectangle 4"/>
-          <p:cNvSpPr/>
-          <p:nvPr/>
-        </p:nvSpPr>
-        <p:spPr>
-          <a:xfrm>
-            <a:off x="731520" y="5120640"/>
-            <a:ext cx="10728655" cy="1005840"/>
-          </a:xfrm>
-          <a:prstGeom prst="roundRect">
-            <a:avLst/>
-          </a:prstGeom>
-          <a:solidFill>
-            <a:srgbClr val="162D55"/>
-          </a:solidFill>
-          <a:ln w="12700">
-            <a:solidFill>
-              <a:srgbClr val="284B82"/>
-            </a:solidFill>
-          </a:ln>
-        </p:spPr>
-        <p:style>
-          <a:lnRef idx="1">
-            <a:schemeClr val="accent1"/>
-          </a:lnRef>
-          <a:fillRef idx="3">
-            <a:schemeClr val="accent1"/>
-          </a:fillRef>
-          <a:effectRef idx="2">
-            <a:schemeClr val="accent1"/>
-          </a:effectRef>
-          <a:fontRef idx="minor">
-            <a:schemeClr val="lt1"/>
-          </a:fontRef>
-        </p:style>
-        <p:txBody>
-          <a:bodyPr rtlCol="0" anchor="ctr"/>
-          <a:lstStyle/>
-          <a:p>
-            <a:pPr algn="ctr">
-              <a:defRPr sz="1200">
-                <a:solidFill>
-                  <a:srgbClr val="FFFFFF"/>
+          <a:p>
+            <a:pPr>
+              <a:spcBef>
+                <a:spcPts val="3600"/>
+              </a:spcBef>
+              <a:defRPr sz="1100">
+                <a:solidFill>
+                  <a:srgbClr val="96AFCD"/>
                 </a:solidFill>
                 <a:latin typeface="微軟正黑體"/>
               </a:defRPr>
@@ -3373,112 +3291,14 @@
       </p:sp>
       <p:sp>
         <p:nvSpPr>
-          <p:cNvPr id="3" name="Rectangle 2"/>
-          <p:cNvSpPr/>
-          <p:nvPr/>
-        </p:nvSpPr>
-        <p:spPr>
-          <a:xfrm>
-            <a:off x="0" y="0"/>
-            <a:ext cx="12191695" cy="109728"/>
-          </a:xfrm>
-          <a:prstGeom prst="rect">
-            <a:avLst/>
-          </a:prstGeom>
-          <a:solidFill>
-            <a:srgbClr val="1B365D"/>
-          </a:solidFill>
-          <a:ln>
-            <a:noFill/>
-          </a:ln>
-        </p:spPr>
-        <p:style>
-          <a:lnRef idx="1">
-            <a:schemeClr val="accent1"/>
-          </a:lnRef>
-          <a:fillRef idx="3">
-            <a:schemeClr val="accent1"/>
-          </a:fillRef>
-          <a:effectRef idx="2">
-            <a:schemeClr val="accent1"/>
-          </a:effectRef>
-          <a:fontRef idx="minor">
-            <a:schemeClr val="lt1"/>
-          </a:fontRef>
-        </p:style>
-        <p:txBody>
-          <a:bodyPr rtlCol="0" anchor="ctr"/>
-          <a:lstStyle/>
-          <a:p>
-            <a:pPr algn="ctr"/>
-          </a:p>
-        </p:txBody>
-      </p:sp>
-      <p:sp>
-        <p:nvSpPr>
-          <p:cNvPr id="4" name="Rounded Rectangle 3"/>
-          <p:cNvSpPr/>
-          <p:nvPr/>
-        </p:nvSpPr>
-        <p:spPr>
-          <a:xfrm>
-            <a:off x="731520" y="320040"/>
-            <a:ext cx="4114800" cy="292608"/>
-          </a:xfrm>
-          <a:prstGeom prst="roundRect">
-            <a:avLst/>
-          </a:prstGeom>
-          <a:solidFill>
-            <a:srgbClr val="EAF2FA"/>
-          </a:solidFill>
-          <a:ln w="12700">
-            <a:solidFill>
-              <a:srgbClr val="2C5E8A"/>
-            </a:solidFill>
-          </a:ln>
-        </p:spPr>
-        <p:style>
-          <a:lnRef idx="1">
-            <a:schemeClr val="accent1"/>
-          </a:lnRef>
-          <a:fillRef idx="3">
-            <a:schemeClr val="accent1"/>
-          </a:fillRef>
-          <a:effectRef idx="2">
-            <a:schemeClr val="accent1"/>
-          </a:effectRef>
-          <a:fontRef idx="minor">
-            <a:schemeClr val="lt1"/>
-          </a:fontRef>
-        </p:style>
-        <p:txBody>
-          <a:bodyPr rtlCol="0" anchor="ctr" wrap="square"/>
-          <a:lstStyle/>
-          <a:p>
-            <a:pPr algn="ctr">
-              <a:defRPr sz="1000" b="1">
-                <a:solidFill>
-                  <a:srgbClr val="2C5E8A"/>
-                </a:solidFill>
-                <a:latin typeface="微軟正黑體"/>
-              </a:defRPr>
-            </a:pPr>
-            <a:r>
-              <a:t>長億南園 8 樓・房仲向屋主議價溝通簡報</a:t>
-            </a:r>
-          </a:p>
-        </p:txBody>
-      </p:sp>
-      <p:sp>
-        <p:nvSpPr>
-          <p:cNvPr id="5" name="TextBox 4"/>
+          <p:cNvPr id="3" name="TextBox 2"/>
           <p:cNvSpPr txBox="1"/>
           <p:nvPr/>
         </p:nvSpPr>
         <p:spPr>
           <a:xfrm>
-            <a:off x="731520" y="621792"/>
-            <a:ext cx="10698480" cy="594360"/>
+            <a:off x="731520" y="365760"/>
+            <a:ext cx="10728655" cy="822960"/>
           </a:xfrm>
           <a:prstGeom prst="rect">
             <a:avLst/>
@@ -3486,12 +3306,28 @@
           <a:noFill/>
         </p:spPr>
         <p:txBody>
-          <a:bodyPr wrap="square">
+          <a:bodyPr wrap="square" lIns="0" tIns="0" rIns="0" bIns="0">
             <a:spAutoFit/>
           </a:bodyPr>
           <a:lstStyle/>
           <a:p>
             <a:pPr>
+              <a:defRPr sz="1000" b="1">
+                <a:solidFill>
+                  <a:srgbClr val="D98C14"/>
+                </a:solidFill>
+                <a:latin typeface="微軟正黑體"/>
+              </a:defRPr>
+            </a:pPr>
+            <a:r>
+              <a:t>長億南園 8 樓・房仲向屋主議價溝通簡報</a:t>
+            </a:r>
+          </a:p>
+          <a:p>
+            <a:pPr>
+              <a:spcBef>
+                <a:spcPts val="200"/>
+              </a:spcBef>
               <a:defRPr sz="2000" b="1">
                 <a:solidFill>
                   <a:srgbClr val="1B365D"/>
@@ -3500,14 +3336,14 @@
               </a:defRPr>
             </a:pPr>
             <a:r>
-              <a:t>說服理由 7：雙衛浴皆無對外窗＋裝修自然折舊，買方無法追高</a:t>
-            </a:r>
-          </a:p>
-        </p:txBody>
-      </p:sp>
-      <p:sp>
-        <p:nvSpPr>
-          <p:cNvPr id="6" name="Rounded Rectangle 5"/>
+              <a:t>說服理由 7：雙衛浴皆無對外窗＋舊裝潢清運泥作工程龐大，買方無法追高</a:t>
+            </a:r>
+          </a:p>
+        </p:txBody>
+      </p:sp>
+      <p:sp>
+        <p:nvSpPr>
+          <p:cNvPr id="4" name="Rectangle 3"/>
           <p:cNvSpPr/>
           <p:nvPr/>
         </p:nvSpPr>
@@ -3516,7 +3352,7 @@
             <a:off x="731520" y="1371600"/>
             <a:ext cx="5212080" cy="4754880"/>
           </a:xfrm>
-          <a:prstGeom prst="roundRect">
+          <a:prstGeom prst="rect">
             <a:avLst/>
           </a:prstGeom>
           <a:solidFill>
@@ -3552,7 +3388,7 @@
       </p:sp>
       <p:sp>
         <p:nvSpPr>
-          <p:cNvPr id="7" name="TextBox 6"/>
+          <p:cNvPr id="5" name="TextBox 4"/>
           <p:cNvSpPr txBox="1"/>
           <p:nvPr/>
         </p:nvSpPr>
@@ -3590,9 +3426,9 @@
                 <a:spcPct val="130000"/>
               </a:lnSpc>
               <a:spcBef>
-                <a:spcPts val="1400"/>
+                <a:spcPts val="1200"/>
               </a:spcBef>
-              <a:defRPr sz="1200">
+              <a:defRPr sz="1150">
                 <a:solidFill>
                   <a:srgbClr val="1E293B"/>
                 </a:solidFill>
@@ -3604,22 +3440,22 @@
             </a:r>
             <a:br/>
             <a:r>
-              <a:t>• 雙衛浴皆無對外窗（暗房衛浴），通風排濕不良。</a:t>
+              <a:t>• 原本舊有裝潢、衣櫃、固定書桌，買方均需拆除清運，重新施作泥作、粉刷、油漆等工程，額外成本負擔沉重！</a:t>
             </a:r>
             <a:br/>
             <a:r>
-              <a:t>• 買方入住前仍須備妥工程款：油漆、窗戶更換、加裝衛浴獨立抽風暖風乾燥系統與基礎整理。</a:t>
+              <a:t>• 雙衛浴皆無對外窗（暗房衛浴），通風排濕不良，須加裝獨立抽風暖風乾燥系統。</a:t>
             </a:r>
             <a:br/>
             <a:r>
-              <a:t>• 這是自住家庭必要支出，扣除後實質預算已達上限。</a:t>
-            </a:r>
-          </a:p>
-        </p:txBody>
-      </p:sp>
-      <p:sp>
-        <p:nvSpPr>
-          <p:cNvPr id="8" name="Rounded Rectangle 7"/>
+              <a:t>• 扣除拆除清運與泥作整修必備支出，買方購屋實質預算已達上限。</a:t>
+            </a:r>
+          </a:p>
+        </p:txBody>
+      </p:sp>
+      <p:sp>
+        <p:nvSpPr>
+          <p:cNvPr id="6" name="Rectangle 5"/>
           <p:cNvSpPr/>
           <p:nvPr/>
         </p:nvSpPr>
@@ -3628,7 +3464,7 @@
             <a:off x="6217920" y="1371600"/>
             <a:ext cx="5212080" cy="4754880"/>
           </a:xfrm>
-          <a:prstGeom prst="roundRect">
+          <a:prstGeom prst="rect">
             <a:avLst/>
           </a:prstGeom>
           <a:solidFill>
@@ -3664,7 +3500,7 @@
       </p:sp>
       <p:sp>
         <p:nvSpPr>
-          <p:cNvPr id="9" name="TextBox 8"/>
+          <p:cNvPr id="7" name="TextBox 6"/>
           <p:cNvSpPr txBox="1"/>
           <p:nvPr/>
         </p:nvSpPr>
@@ -3702,9 +3538,9 @@
                 <a:spcPct val="130000"/>
               </a:lnSpc>
               <a:spcBef>
-                <a:spcPts val="1400"/>
+                <a:spcPts val="1200"/>
               </a:spcBef>
-              <a:defRPr sz="1200">
+              <a:defRPr sz="1150">
                 <a:solidFill>
                   <a:srgbClr val="1E293B"/>
                 </a:solidFill>
@@ -3720,7 +3556,7 @@
             </a:r>
             <a:br/>
             <a:r>
-              <a:t>• 面對老屋折舊與暗衛抗性，買方已出到自身的務實極限，真的無法出高價追價！</a:t>
+              <a:t>• 扣除拆除清運、泥作粉刷與水電整修成本後，買方已出到自身務實極限，真的無法出高價追價！</a:t>
             </a:r>
           </a:p>
         </p:txBody>
@@ -3788,112 +3624,14 @@
       </p:sp>
       <p:sp>
         <p:nvSpPr>
-          <p:cNvPr id="3" name="Rectangle 2"/>
-          <p:cNvSpPr/>
-          <p:nvPr/>
-        </p:nvSpPr>
-        <p:spPr>
-          <a:xfrm>
-            <a:off x="0" y="0"/>
-            <a:ext cx="12191695" cy="109728"/>
-          </a:xfrm>
-          <a:prstGeom prst="rect">
-            <a:avLst/>
-          </a:prstGeom>
-          <a:solidFill>
-            <a:srgbClr val="1B365D"/>
-          </a:solidFill>
-          <a:ln>
-            <a:noFill/>
-          </a:ln>
-        </p:spPr>
-        <p:style>
-          <a:lnRef idx="1">
-            <a:schemeClr val="accent1"/>
-          </a:lnRef>
-          <a:fillRef idx="3">
-            <a:schemeClr val="accent1"/>
-          </a:fillRef>
-          <a:effectRef idx="2">
-            <a:schemeClr val="accent1"/>
-          </a:effectRef>
-          <a:fontRef idx="minor">
-            <a:schemeClr val="lt1"/>
-          </a:fontRef>
-        </p:style>
-        <p:txBody>
-          <a:bodyPr rtlCol="0" anchor="ctr"/>
-          <a:lstStyle/>
-          <a:p>
-            <a:pPr algn="ctr"/>
-          </a:p>
-        </p:txBody>
-      </p:sp>
-      <p:sp>
-        <p:nvSpPr>
-          <p:cNvPr id="4" name="Rounded Rectangle 3"/>
-          <p:cNvSpPr/>
-          <p:nvPr/>
-        </p:nvSpPr>
-        <p:spPr>
-          <a:xfrm>
-            <a:off x="731520" y="320040"/>
-            <a:ext cx="4114800" cy="292608"/>
-          </a:xfrm>
-          <a:prstGeom prst="roundRect">
-            <a:avLst/>
-          </a:prstGeom>
-          <a:solidFill>
-            <a:srgbClr val="EAF2FA"/>
-          </a:solidFill>
-          <a:ln w="12700">
-            <a:solidFill>
-              <a:srgbClr val="2C5E8A"/>
-            </a:solidFill>
-          </a:ln>
-        </p:spPr>
-        <p:style>
-          <a:lnRef idx="1">
-            <a:schemeClr val="accent1"/>
-          </a:lnRef>
-          <a:fillRef idx="3">
-            <a:schemeClr val="accent1"/>
-          </a:fillRef>
-          <a:effectRef idx="2">
-            <a:schemeClr val="accent1"/>
-          </a:effectRef>
-          <a:fontRef idx="minor">
-            <a:schemeClr val="lt1"/>
-          </a:fontRef>
-        </p:style>
-        <p:txBody>
-          <a:bodyPr rtlCol="0" anchor="ctr" wrap="square"/>
-          <a:lstStyle/>
-          <a:p>
-            <a:pPr algn="ctr">
-              <a:defRPr sz="1000" b="1">
-                <a:solidFill>
-                  <a:srgbClr val="2C5E8A"/>
-                </a:solidFill>
-                <a:latin typeface="微軟正黑體"/>
-              </a:defRPr>
-            </a:pPr>
-            <a:r>
-              <a:t>長億南園 8 樓・房仲向屋主議價溝通簡報</a:t>
-            </a:r>
-          </a:p>
-        </p:txBody>
-      </p:sp>
-      <p:sp>
-        <p:nvSpPr>
-          <p:cNvPr id="5" name="TextBox 4"/>
+          <p:cNvPr id="3" name="TextBox 2"/>
           <p:cNvSpPr txBox="1"/>
           <p:nvPr/>
         </p:nvSpPr>
         <p:spPr>
           <a:xfrm>
-            <a:off x="731520" y="621792"/>
-            <a:ext cx="10698480" cy="594360"/>
+            <a:off x="731520" y="365760"/>
+            <a:ext cx="10728655" cy="822960"/>
           </a:xfrm>
           <a:prstGeom prst="rect">
             <a:avLst/>
@@ -3901,12 +3639,28 @@
           <a:noFill/>
         </p:spPr>
         <p:txBody>
-          <a:bodyPr wrap="square">
+          <a:bodyPr wrap="square" lIns="0" tIns="0" rIns="0" bIns="0">
             <a:spAutoFit/>
           </a:bodyPr>
           <a:lstStyle/>
           <a:p>
             <a:pPr>
+              <a:defRPr sz="1000" b="1">
+                <a:solidFill>
+                  <a:srgbClr val="D98C14"/>
+                </a:solidFill>
+                <a:latin typeface="微軟正黑體"/>
+              </a:defRPr>
+            </a:pPr>
+            <a:r>
+              <a:t>長億南園 8 樓・房仲向屋主議價溝通簡報</a:t>
+            </a:r>
+          </a:p>
+          <a:p>
+            <a:pPr>
+              <a:spcBef>
+                <a:spcPts val="200"/>
+              </a:spcBef>
               <a:defRPr sz="2000" b="1">
                 <a:solidFill>
                   <a:srgbClr val="1B365D"/>
@@ -3922,7 +3676,7 @@
       </p:sp>
       <p:graphicFrame>
         <p:nvGraphicFramePr>
-          <p:cNvPr id="6" name="Table 5"/>
+          <p:cNvPr id="4" name="Table 3"/>
           <p:cNvGraphicFramePr>
             <a:graphicFrameLocks noGrp="1"/>
           </p:cNvGraphicFramePr>
@@ -4204,7 +3958,7 @@
                         </a:defRPr>
                       </a:pPr>
                       <a:r>
-                        <a:t>在 700 多萬價位順利成交</a:t>
+                        <a:t>在較高價位順利成交</a:t>
                       </a:r>
                     </a:p>
                   </a:txBody>
@@ -4319,7 +4073,7 @@
       </p:graphicFrame>
       <p:sp>
         <p:nvSpPr>
-          <p:cNvPr id="7" name="TextBox 6"/>
+          <p:cNvPr id="5" name="TextBox 4"/>
           <p:cNvSpPr txBox="1"/>
           <p:nvPr/>
         </p:nvSpPr>
@@ -4348,7 +4102,11 @@
               </a:defRPr>
             </a:pPr>
             <a:r>
-              <a:t>🏆 獲利了結論點：屋主買 670 萬已享受 8 年居住增值，今天賣出保證倒賺幾十萬現金且不用繳房地合一稅！在房市反轉向下之際，及時把數百萬現金抱在身上，比繼續套在 35 年老屋承擔跌價風險聰明太多！</a:t>
+              <a:t>🏆 獲利了結論點：屋主買 670 萬已享受 8 年居住增值，今天賣出保證倒賺幾十萬現金且不用繳房地合一稅！</a:t>
+            </a:r>
+            <a:br/>
+            <a:r>
+              <a:t>在房市反轉向下之際，及時把現金抱在身上，比繼續套在 35 年老屋承擔跌價風險聰明太多！</a:t>
             </a:r>
           </a:p>
         </p:txBody>
@@ -4416,112 +4174,14 @@
       </p:sp>
       <p:sp>
         <p:nvSpPr>
-          <p:cNvPr id="3" name="Rectangle 2"/>
-          <p:cNvSpPr/>
-          <p:nvPr/>
-        </p:nvSpPr>
-        <p:spPr>
-          <a:xfrm>
-            <a:off x="0" y="0"/>
-            <a:ext cx="12191695" cy="109728"/>
-          </a:xfrm>
-          <a:prstGeom prst="rect">
-            <a:avLst/>
-          </a:prstGeom>
-          <a:solidFill>
-            <a:srgbClr val="1B365D"/>
-          </a:solidFill>
-          <a:ln>
-            <a:noFill/>
-          </a:ln>
-        </p:spPr>
-        <p:style>
-          <a:lnRef idx="1">
-            <a:schemeClr val="accent1"/>
-          </a:lnRef>
-          <a:fillRef idx="3">
-            <a:schemeClr val="accent1"/>
-          </a:fillRef>
-          <a:effectRef idx="2">
-            <a:schemeClr val="accent1"/>
-          </a:effectRef>
-          <a:fontRef idx="minor">
-            <a:schemeClr val="lt1"/>
-          </a:fontRef>
-        </p:style>
-        <p:txBody>
-          <a:bodyPr rtlCol="0" anchor="ctr"/>
-          <a:lstStyle/>
-          <a:p>
-            <a:pPr algn="ctr"/>
-          </a:p>
-        </p:txBody>
-      </p:sp>
-      <p:sp>
-        <p:nvSpPr>
-          <p:cNvPr id="4" name="Rounded Rectangle 3"/>
-          <p:cNvSpPr/>
-          <p:nvPr/>
-        </p:nvSpPr>
-        <p:spPr>
-          <a:xfrm>
-            <a:off x="731520" y="320040"/>
-            <a:ext cx="4114800" cy="292608"/>
-          </a:xfrm>
-          <a:prstGeom prst="roundRect">
-            <a:avLst/>
-          </a:prstGeom>
-          <a:solidFill>
-            <a:srgbClr val="EAF2FA"/>
-          </a:solidFill>
-          <a:ln w="12700">
-            <a:solidFill>
-              <a:srgbClr val="2C5E8A"/>
-            </a:solidFill>
-          </a:ln>
-        </p:spPr>
-        <p:style>
-          <a:lnRef idx="1">
-            <a:schemeClr val="accent1"/>
-          </a:lnRef>
-          <a:fillRef idx="3">
-            <a:schemeClr val="accent1"/>
-          </a:fillRef>
-          <a:effectRef idx="2">
-            <a:schemeClr val="accent1"/>
-          </a:effectRef>
-          <a:fontRef idx="minor">
-            <a:schemeClr val="lt1"/>
-          </a:fontRef>
-        </p:style>
-        <p:txBody>
-          <a:bodyPr rtlCol="0" anchor="ctr" wrap="square"/>
-          <a:lstStyle/>
-          <a:p>
-            <a:pPr algn="ctr">
-              <a:defRPr sz="1000" b="1">
-                <a:solidFill>
-                  <a:srgbClr val="2C5E8A"/>
-                </a:solidFill>
-                <a:latin typeface="微軟正黑體"/>
-              </a:defRPr>
-            </a:pPr>
-            <a:r>
-              <a:t>長億南園 8 樓・房仲向屋主議價溝通簡報</a:t>
-            </a:r>
-          </a:p>
-        </p:txBody>
-      </p:sp>
-      <p:sp>
-        <p:nvSpPr>
-          <p:cNvPr id="5" name="TextBox 4"/>
+          <p:cNvPr id="3" name="TextBox 2"/>
           <p:cNvSpPr txBox="1"/>
           <p:nvPr/>
         </p:nvSpPr>
         <p:spPr>
           <a:xfrm>
-            <a:off x="731520" y="621792"/>
-            <a:ext cx="10698480" cy="594360"/>
+            <a:off x="731520" y="365760"/>
+            <a:ext cx="10728655" cy="822960"/>
           </a:xfrm>
           <a:prstGeom prst="rect">
             <a:avLst/>
@@ -4529,12 +4189,28 @@
           <a:noFill/>
         </p:spPr>
         <p:txBody>
-          <a:bodyPr wrap="square">
+          <a:bodyPr wrap="square" lIns="0" tIns="0" rIns="0" bIns="0">
             <a:spAutoFit/>
           </a:bodyPr>
           <a:lstStyle/>
           <a:p>
             <a:pPr>
+              <a:defRPr sz="1000" b="1">
+                <a:solidFill>
+                  <a:srgbClr val="D98C14"/>
+                </a:solidFill>
+                <a:latin typeface="微軟正黑體"/>
+              </a:defRPr>
+            </a:pPr>
+            <a:r>
+              <a:t>長億南園 8 樓・房仲向屋主議價溝通簡報</a:t>
+            </a:r>
+          </a:p>
+          <a:p>
+            <a:pPr>
+              <a:spcBef>
+                <a:spcPts val="200"/>
+              </a:spcBef>
               <a:defRPr sz="2000" b="1">
                 <a:solidFill>
                   <a:srgbClr val="1B365D"/>
@@ -4550,7 +4226,7 @@
       </p:sp>
       <p:sp>
         <p:nvSpPr>
-          <p:cNvPr id="6" name="Rounded Rectangle 5"/>
+          <p:cNvPr id="4" name="Rectangle 3"/>
           <p:cNvSpPr/>
           <p:nvPr/>
         </p:nvSpPr>
@@ -4559,7 +4235,7 @@
             <a:off x="731520" y="1371600"/>
             <a:ext cx="5212080" cy="4754880"/>
           </a:xfrm>
-          <a:prstGeom prst="roundRect">
+          <a:prstGeom prst="rect">
             <a:avLst/>
           </a:prstGeom>
           <a:solidFill>
@@ -4595,7 +4271,7 @@
       </p:sp>
       <p:sp>
         <p:nvSpPr>
-          <p:cNvPr id="7" name="TextBox 6"/>
+          <p:cNvPr id="5" name="TextBox 4"/>
           <p:cNvSpPr txBox="1"/>
           <p:nvPr/>
         </p:nvSpPr>
@@ -4658,7 +4334,7 @@
       </p:sp>
       <p:sp>
         <p:nvSpPr>
-          <p:cNvPr id="8" name="Rounded Rectangle 7"/>
+          <p:cNvPr id="6" name="Rectangle 5"/>
           <p:cNvSpPr/>
           <p:nvPr/>
         </p:nvSpPr>
@@ -4667,7 +4343,7 @@
             <a:off x="6217920" y="1371600"/>
             <a:ext cx="5212080" cy="4754880"/>
           </a:xfrm>
-          <a:prstGeom prst="roundRect">
+          <a:prstGeom prst="rect">
             <a:avLst/>
           </a:prstGeom>
           <a:solidFill>
@@ -4703,7 +4379,7 @@
       </p:sp>
       <p:sp>
         <p:nvSpPr>
-          <p:cNvPr id="9" name="TextBox 8"/>
+          <p:cNvPr id="7" name="TextBox 6"/>
           <p:cNvSpPr txBox="1"/>
           <p:nvPr/>
         </p:nvSpPr>
@@ -4755,7 +4431,7 @@
             </a:r>
             <a:br/>
             <a:r>
-              <a:t>• 賣屋收回 670 萬本金加獲利共七百多萬現金，投入高股息或穩健定存，每年穩領 20～30 萬被動收入！</a:t>
+              <a:t>• 賣屋收回 670 萬本金加獲利，投入高股息或穩健定存，每年穩領 20～30 萬被動收入！</a:t>
             </a:r>
             <a:br/>
             <a:r>
@@ -4827,112 +4503,14 @@
       </p:sp>
       <p:sp>
         <p:nvSpPr>
-          <p:cNvPr id="3" name="Rectangle 2"/>
-          <p:cNvSpPr/>
-          <p:nvPr/>
-        </p:nvSpPr>
-        <p:spPr>
-          <a:xfrm>
-            <a:off x="0" y="0"/>
-            <a:ext cx="12191695" cy="109728"/>
-          </a:xfrm>
-          <a:prstGeom prst="rect">
-            <a:avLst/>
-          </a:prstGeom>
-          <a:solidFill>
-            <a:srgbClr val="1B365D"/>
-          </a:solidFill>
-          <a:ln>
-            <a:noFill/>
-          </a:ln>
-        </p:spPr>
-        <p:style>
-          <a:lnRef idx="1">
-            <a:schemeClr val="accent1"/>
-          </a:lnRef>
-          <a:fillRef idx="3">
-            <a:schemeClr val="accent1"/>
-          </a:fillRef>
-          <a:effectRef idx="2">
-            <a:schemeClr val="accent1"/>
-          </a:effectRef>
-          <a:fontRef idx="minor">
-            <a:schemeClr val="lt1"/>
-          </a:fontRef>
-        </p:style>
-        <p:txBody>
-          <a:bodyPr rtlCol="0" anchor="ctr"/>
-          <a:lstStyle/>
-          <a:p>
-            <a:pPr algn="ctr"/>
-          </a:p>
-        </p:txBody>
-      </p:sp>
-      <p:sp>
-        <p:nvSpPr>
-          <p:cNvPr id="4" name="Rounded Rectangle 3"/>
-          <p:cNvSpPr/>
-          <p:nvPr/>
-        </p:nvSpPr>
-        <p:spPr>
-          <a:xfrm>
-            <a:off x="731520" y="320040"/>
-            <a:ext cx="4114800" cy="292608"/>
-          </a:xfrm>
-          <a:prstGeom prst="roundRect">
-            <a:avLst/>
-          </a:prstGeom>
-          <a:solidFill>
-            <a:srgbClr val="EAF2FA"/>
-          </a:solidFill>
-          <a:ln w="12700">
-            <a:solidFill>
-              <a:srgbClr val="2C5E8A"/>
-            </a:solidFill>
-          </a:ln>
-        </p:spPr>
-        <p:style>
-          <a:lnRef idx="1">
-            <a:schemeClr val="accent1"/>
-          </a:lnRef>
-          <a:fillRef idx="3">
-            <a:schemeClr val="accent1"/>
-          </a:fillRef>
-          <a:effectRef idx="2">
-            <a:schemeClr val="accent1"/>
-          </a:effectRef>
-          <a:fontRef idx="minor">
-            <a:schemeClr val="lt1"/>
-          </a:fontRef>
-        </p:style>
-        <p:txBody>
-          <a:bodyPr rtlCol="0" anchor="ctr" wrap="square"/>
-          <a:lstStyle/>
-          <a:p>
-            <a:pPr algn="ctr">
-              <a:defRPr sz="1000" b="1">
-                <a:solidFill>
-                  <a:srgbClr val="2C5E8A"/>
-                </a:solidFill>
-                <a:latin typeface="微軟正黑體"/>
-              </a:defRPr>
-            </a:pPr>
-            <a:r>
-              <a:t>長億南園 8 樓・房仲向屋主議價溝通簡報</a:t>
-            </a:r>
-          </a:p>
-        </p:txBody>
-      </p:sp>
-      <p:sp>
-        <p:nvSpPr>
-          <p:cNvPr id="5" name="TextBox 4"/>
+          <p:cNvPr id="3" name="TextBox 2"/>
           <p:cNvSpPr txBox="1"/>
           <p:nvPr/>
         </p:nvSpPr>
         <p:spPr>
           <a:xfrm>
-            <a:off x="731520" y="621792"/>
-            <a:ext cx="10698480" cy="594360"/>
+            <a:off x="731520" y="365760"/>
+            <a:ext cx="10728655" cy="822960"/>
           </a:xfrm>
           <a:prstGeom prst="rect">
             <a:avLst/>
@@ -4940,12 +4518,28 @@
           <a:noFill/>
         </p:spPr>
         <p:txBody>
-          <a:bodyPr wrap="square">
+          <a:bodyPr wrap="square" lIns="0" tIns="0" rIns="0" bIns="0">
             <a:spAutoFit/>
           </a:bodyPr>
           <a:lstStyle/>
           <a:p>
             <a:pPr>
+              <a:defRPr sz="1000" b="1">
+                <a:solidFill>
+                  <a:srgbClr val="D98C14"/>
+                </a:solidFill>
+                <a:latin typeface="微軟正黑體"/>
+              </a:defRPr>
+            </a:pPr>
+            <a:r>
+              <a:t>長億南園 8 樓・房仲向屋主議價溝通簡報</a:t>
+            </a:r>
+          </a:p>
+          <a:p>
+            <a:pPr>
+              <a:spcBef>
+                <a:spcPts val="200"/>
+              </a:spcBef>
               <a:defRPr sz="2000" b="1">
                 <a:solidFill>
                   <a:srgbClr val="1B365D"/>
@@ -4961,7 +4555,7 @@
       </p:sp>
       <p:sp>
         <p:nvSpPr>
-          <p:cNvPr id="6" name="Rounded Rectangle 5"/>
+          <p:cNvPr id="4" name="Rectangle 3"/>
           <p:cNvSpPr/>
           <p:nvPr/>
         </p:nvSpPr>
@@ -4970,7 +4564,7 @@
             <a:off x="731520" y="1371600"/>
             <a:ext cx="10728655" cy="4754880"/>
           </a:xfrm>
-          <a:prstGeom prst="roundRect">
+          <a:prstGeom prst="rect">
             <a:avLst/>
           </a:prstGeom>
           <a:solidFill>
@@ -5006,7 +4600,7 @@
       </p:sp>
       <p:sp>
         <p:nvSpPr>
-          <p:cNvPr id="7" name="TextBox 6"/>
+          <p:cNvPr id="5" name="TextBox 4"/>
           <p:cNvSpPr txBox="1"/>
           <p:nvPr/>
         </p:nvSpPr>
@@ -5069,7 +4663,7 @@
             <a:br/>
             <a:br/>
             <a:r>
-              <a:t>信義房屋那邊今天還在積極催買方去簽南屯的大墩人文，請大哥／大姐今天就痛快做決定，給我們授權簽字，我們立刻幫您把七百多萬的現金穩穩落袋！」</a:t>
+              <a:t>信義房屋那邊今天還在積極催買方去簽南屯的大墩人文，請大哥／大姐今天就做決定，給我們授權簽字，我們立刻幫您把現金穩穩落袋！」</a:t>
             </a:r>
           </a:p>
         </p:txBody>
@@ -5266,112 +4860,14 @@
       </p:sp>
       <p:sp>
         <p:nvSpPr>
-          <p:cNvPr id="3" name="Rectangle 2"/>
-          <p:cNvSpPr/>
-          <p:nvPr/>
-        </p:nvSpPr>
-        <p:spPr>
-          <a:xfrm>
-            <a:off x="0" y="0"/>
-            <a:ext cx="12191695" cy="109728"/>
-          </a:xfrm>
-          <a:prstGeom prst="rect">
-            <a:avLst/>
-          </a:prstGeom>
-          <a:solidFill>
-            <a:srgbClr val="1B365D"/>
-          </a:solidFill>
-          <a:ln>
-            <a:noFill/>
-          </a:ln>
-        </p:spPr>
-        <p:style>
-          <a:lnRef idx="1">
-            <a:schemeClr val="accent1"/>
-          </a:lnRef>
-          <a:fillRef idx="3">
-            <a:schemeClr val="accent1"/>
-          </a:fillRef>
-          <a:effectRef idx="2">
-            <a:schemeClr val="accent1"/>
-          </a:effectRef>
-          <a:fontRef idx="minor">
-            <a:schemeClr val="lt1"/>
-          </a:fontRef>
-        </p:style>
-        <p:txBody>
-          <a:bodyPr rtlCol="0" anchor="ctr"/>
-          <a:lstStyle/>
-          <a:p>
-            <a:pPr algn="ctr"/>
-          </a:p>
-        </p:txBody>
-      </p:sp>
-      <p:sp>
-        <p:nvSpPr>
-          <p:cNvPr id="4" name="Rounded Rectangle 3"/>
-          <p:cNvSpPr/>
-          <p:nvPr/>
-        </p:nvSpPr>
-        <p:spPr>
-          <a:xfrm>
-            <a:off x="731520" y="320040"/>
-            <a:ext cx="4114800" cy="292608"/>
-          </a:xfrm>
-          <a:prstGeom prst="roundRect">
-            <a:avLst/>
-          </a:prstGeom>
-          <a:solidFill>
-            <a:srgbClr val="EAF2FA"/>
-          </a:solidFill>
-          <a:ln w="12700">
-            <a:solidFill>
-              <a:srgbClr val="2C5E8A"/>
-            </a:solidFill>
-          </a:ln>
-        </p:spPr>
-        <p:style>
-          <a:lnRef idx="1">
-            <a:schemeClr val="accent1"/>
-          </a:lnRef>
-          <a:fillRef idx="3">
-            <a:schemeClr val="accent1"/>
-          </a:fillRef>
-          <a:effectRef idx="2">
-            <a:schemeClr val="accent1"/>
-          </a:effectRef>
-          <a:fontRef idx="minor">
-            <a:schemeClr val="lt1"/>
-          </a:fontRef>
-        </p:style>
-        <p:txBody>
-          <a:bodyPr rtlCol="0" anchor="ctr" wrap="square"/>
-          <a:lstStyle/>
-          <a:p>
-            <a:pPr algn="ctr">
-              <a:defRPr sz="1000" b="1">
-                <a:solidFill>
-                  <a:srgbClr val="2C5E8A"/>
-                </a:solidFill>
-                <a:latin typeface="微軟正黑體"/>
-              </a:defRPr>
-            </a:pPr>
-            <a:r>
-              <a:t>長億南園 8 樓・房仲向屋主議價溝通簡報</a:t>
-            </a:r>
-          </a:p>
-        </p:txBody>
-      </p:sp>
-      <p:sp>
-        <p:nvSpPr>
-          <p:cNvPr id="5" name="TextBox 4"/>
+          <p:cNvPr id="3" name="TextBox 2"/>
           <p:cNvSpPr txBox="1"/>
           <p:nvPr/>
         </p:nvSpPr>
         <p:spPr>
           <a:xfrm>
-            <a:off x="731520" y="621792"/>
-            <a:ext cx="10698480" cy="594360"/>
+            <a:off x="731520" y="365760"/>
+            <a:ext cx="10728655" cy="822960"/>
           </a:xfrm>
           <a:prstGeom prst="rect">
             <a:avLst/>
@@ -5379,12 +4875,28 @@
           <a:noFill/>
         </p:spPr>
         <p:txBody>
-          <a:bodyPr wrap="square">
+          <a:bodyPr wrap="square" lIns="0" tIns="0" rIns="0" bIns="0">
             <a:spAutoFit/>
           </a:bodyPr>
           <a:lstStyle/>
           <a:p>
             <a:pPr>
+              <a:defRPr sz="1000" b="1">
+                <a:solidFill>
+                  <a:srgbClr val="D98C14"/>
+                </a:solidFill>
+                <a:latin typeface="微軟正黑體"/>
+              </a:defRPr>
+            </a:pPr>
+            <a:r>
+              <a:t>長億南園 8 樓・房仲向屋主議價溝通簡報</a:t>
+            </a:r>
+          </a:p>
+          <a:p>
+            <a:pPr>
+              <a:spcBef>
+                <a:spcPts val="200"/>
+              </a:spcBef>
               <a:defRPr sz="2000" b="1">
                 <a:solidFill>
                   <a:srgbClr val="1B365D"/>
@@ -5400,16 +4912,16 @@
       </p:sp>
       <p:sp>
         <p:nvSpPr>
-          <p:cNvPr id="6" name="Rounded Rectangle 5"/>
+          <p:cNvPr id="4" name="Rectangle 3"/>
           <p:cNvSpPr/>
           <p:nvPr/>
         </p:nvSpPr>
         <p:spPr>
           <a:xfrm>
             <a:off x="731520" y="1371600"/>
-            <a:ext cx="5212080" cy="2377440"/>
-          </a:xfrm>
-          <a:prstGeom prst="roundRect">
+            <a:ext cx="2514600" cy="4754880"/>
+          </a:xfrm>
+          <a:prstGeom prst="rect">
             <a:avLst/>
           </a:prstGeom>
           <a:solidFill>
@@ -5445,14 +4957,14 @@
       </p:sp>
       <p:sp>
         <p:nvSpPr>
-          <p:cNvPr id="7" name="TextBox 6"/>
+          <p:cNvPr id="5" name="TextBox 4"/>
           <p:cNvSpPr txBox="1"/>
           <p:nvPr/>
         </p:nvSpPr>
         <p:spPr>
           <a:xfrm>
-            <a:off x="914400" y="1508760"/>
-            <a:ext cx="4846320" cy="457200"/>
+            <a:off x="914400" y="1554480"/>
+            <a:ext cx="2148840" cy="4297680"/>
           </a:xfrm>
           <a:prstGeom prst="rect">
             <a:avLst/>
@@ -5460,52 +4972,32 @@
           <a:noFill/>
         </p:spPr>
         <p:txBody>
-          <a:bodyPr wrap="none">
-            <a:spAutoFit/>
-          </a:bodyPr>
-          <a:lstStyle/>
-          <a:p>
-            <a:pPr>
-              <a:defRPr sz="1600" b="1">
-                <a:solidFill>
-                  <a:srgbClr val="C0392B"/>
-                </a:solidFill>
-                <a:latin typeface="微軟正黑體"/>
-              </a:defRPr>
-            </a:pPr>
-            <a:r>
-              <a:t>📉 大盤確認反轉下修</a:t>
-            </a:r>
-          </a:p>
-        </p:txBody>
-      </p:sp>
-      <p:sp>
-        <p:nvSpPr>
-          <p:cNvPr id="8" name="TextBox 7"/>
-          <p:cNvSpPr txBox="1"/>
-          <p:nvPr/>
-        </p:nvSpPr>
-        <p:spPr>
-          <a:xfrm>
-            <a:off x="914400" y="2011680"/>
-            <a:ext cx="4846320" cy="1554480"/>
-          </a:xfrm>
-          <a:prstGeom prst="rect">
-            <a:avLst/>
-          </a:prstGeom>
-          <a:noFill/>
-        </p:spPr>
-        <p:txBody>
           <a:bodyPr wrap="square">
             <a:spAutoFit/>
           </a:bodyPr>
           <a:lstStyle/>
+          <a:p>
+            <a:pPr>
+              <a:defRPr sz="1400" b="1">
+                <a:solidFill>
+                  <a:srgbClr val="C0392B"/>
+                </a:solidFill>
+                <a:latin typeface="微軟正黑體"/>
+              </a:defRPr>
+            </a:pPr>
+            <a:r>
+              <a:t>📉 大盤確認反轉下修</a:t>
+            </a:r>
+          </a:p>
           <a:p>
             <a:pPr>
               <a:lnSpc>
                 <a:spcPct val="130000"/>
               </a:lnSpc>
-              <a:defRPr sz="1200">
+              <a:spcBef>
+                <a:spcPts val="1200"/>
+              </a:spcBef>
+              <a:defRPr sz="1100">
                 <a:solidFill>
                   <a:srgbClr val="1E293B"/>
                 </a:solidFill>
@@ -5520,16 +5012,16 @@
       </p:sp>
       <p:sp>
         <p:nvSpPr>
-          <p:cNvPr id="9" name="Rounded Rectangle 8"/>
+          <p:cNvPr id="6" name="Rectangle 5"/>
           <p:cNvSpPr/>
           <p:nvPr/>
         </p:nvSpPr>
         <p:spPr>
           <a:xfrm>
-            <a:off x="6217920" y="1371600"/>
-            <a:ext cx="5212080" cy="2377440"/>
-          </a:xfrm>
-          <a:prstGeom prst="roundRect">
+            <a:off x="3474720" y="1371600"/>
+            <a:ext cx="2514600" cy="4754880"/>
+          </a:xfrm>
+          <a:prstGeom prst="rect">
             <a:avLst/>
           </a:prstGeom>
           <a:solidFill>
@@ -5565,14 +5057,14 @@
       </p:sp>
       <p:sp>
         <p:nvSpPr>
-          <p:cNvPr id="10" name="TextBox 9"/>
+          <p:cNvPr id="7" name="TextBox 6"/>
           <p:cNvSpPr txBox="1"/>
           <p:nvPr/>
         </p:nvSpPr>
         <p:spPr>
           <a:xfrm>
-            <a:off x="6400800" y="1508760"/>
-            <a:ext cx="4846320" cy="457200"/>
+            <a:off x="3657600" y="1554480"/>
+            <a:ext cx="2148840" cy="4297680"/>
           </a:xfrm>
           <a:prstGeom prst="rect">
             <a:avLst/>
@@ -5580,52 +5072,32 @@
           <a:noFill/>
         </p:spPr>
         <p:txBody>
-          <a:bodyPr wrap="none">
-            <a:spAutoFit/>
-          </a:bodyPr>
-          <a:lstStyle/>
-          <a:p>
-            <a:pPr>
-              <a:defRPr sz="1600" b="1">
-                <a:solidFill>
-                  <a:srgbClr val="D98C14"/>
-                </a:solidFill>
-                <a:latin typeface="微軟正黑體"/>
-              </a:defRPr>
-            </a:pPr>
-            <a:r>
-              <a:t>🏢 同社區 4 戶競售剖析</a:t>
-            </a:r>
-          </a:p>
-        </p:txBody>
-      </p:sp>
-      <p:sp>
-        <p:nvSpPr>
-          <p:cNvPr id="11" name="TextBox 10"/>
-          <p:cNvSpPr txBox="1"/>
-          <p:nvPr/>
-        </p:nvSpPr>
-        <p:spPr>
-          <a:xfrm>
-            <a:off x="6400800" y="2011680"/>
-            <a:ext cx="4846320" cy="1554480"/>
-          </a:xfrm>
-          <a:prstGeom prst="rect">
-            <a:avLst/>
-          </a:prstGeom>
-          <a:noFill/>
-        </p:spPr>
-        <p:txBody>
           <a:bodyPr wrap="square">
             <a:spAutoFit/>
           </a:bodyPr>
           <a:lstStyle/>
+          <a:p>
+            <a:pPr>
+              <a:defRPr sz="1400" b="1">
+                <a:solidFill>
+                  <a:srgbClr val="D98C14"/>
+                </a:solidFill>
+                <a:latin typeface="微軟正黑體"/>
+              </a:defRPr>
+            </a:pPr>
+            <a:r>
+              <a:t>🏢 同社區 4 戶競售剖析</a:t>
+            </a:r>
+          </a:p>
           <a:p>
             <a:pPr>
               <a:lnSpc>
                 <a:spcPct val="130000"/>
               </a:lnSpc>
-              <a:defRPr sz="1200">
+              <a:spcBef>
+                <a:spcPts val="1200"/>
+              </a:spcBef>
+              <a:defRPr sz="1100">
                 <a:solidFill>
                   <a:srgbClr val="1E293B"/>
                 </a:solidFill>
@@ -5640,16 +5112,16 @@
       </p:sp>
       <p:sp>
         <p:nvSpPr>
-          <p:cNvPr id="12" name="Rounded Rectangle 11"/>
+          <p:cNvPr id="8" name="Rectangle 7"/>
           <p:cNvSpPr/>
           <p:nvPr/>
         </p:nvSpPr>
         <p:spPr>
           <a:xfrm>
-            <a:off x="731520" y="3931920"/>
-            <a:ext cx="5212080" cy="2377440"/>
-          </a:xfrm>
-          <a:prstGeom prst="roundRect">
+            <a:off x="6217920" y="1371600"/>
+            <a:ext cx="2514600" cy="4754880"/>
+          </a:xfrm>
+          <a:prstGeom prst="rect">
             <a:avLst/>
           </a:prstGeom>
           <a:solidFill>
@@ -5685,14 +5157,14 @@
       </p:sp>
       <p:sp>
         <p:nvSpPr>
-          <p:cNvPr id="13" name="TextBox 12"/>
+          <p:cNvPr id="9" name="TextBox 8"/>
           <p:cNvSpPr txBox="1"/>
           <p:nvPr/>
         </p:nvSpPr>
         <p:spPr>
           <a:xfrm>
-            <a:off x="914400" y="4069080"/>
-            <a:ext cx="4846320" cy="457200"/>
+            <a:off x="6400800" y="1554480"/>
+            <a:ext cx="2148840" cy="4297680"/>
           </a:xfrm>
           <a:prstGeom prst="rect">
             <a:avLst/>
@@ -5700,52 +5172,32 @@
           <a:noFill/>
         </p:spPr>
         <p:txBody>
-          <a:bodyPr wrap="none">
-            <a:spAutoFit/>
-          </a:bodyPr>
-          <a:lstStyle/>
-          <a:p>
-            <a:pPr>
-              <a:defRPr sz="1600" b="1">
-                <a:solidFill>
-                  <a:srgbClr val="2C5E8A"/>
-                </a:solidFill>
-                <a:latin typeface="微軟正黑體"/>
-              </a:defRPr>
-            </a:pPr>
-            <a:r>
-              <a:t>⚡ 南屯大墩人文強烈威脅</a:t>
-            </a:r>
-          </a:p>
-        </p:txBody>
-      </p:sp>
-      <p:sp>
-        <p:nvSpPr>
-          <p:cNvPr id="14" name="TextBox 13"/>
-          <p:cNvSpPr txBox="1"/>
-          <p:nvPr/>
-        </p:nvSpPr>
-        <p:spPr>
-          <a:xfrm>
-            <a:off x="914400" y="4572000"/>
-            <a:ext cx="4846320" cy="1554480"/>
-          </a:xfrm>
-          <a:prstGeom prst="rect">
-            <a:avLst/>
-          </a:prstGeom>
-          <a:noFill/>
-        </p:spPr>
-        <p:txBody>
           <a:bodyPr wrap="square">
             <a:spAutoFit/>
           </a:bodyPr>
           <a:lstStyle/>
+          <a:p>
+            <a:pPr>
+              <a:defRPr sz="1400" b="1">
+                <a:solidFill>
+                  <a:srgbClr val="2C5E8A"/>
+                </a:solidFill>
+                <a:latin typeface="微軟正黑體"/>
+              </a:defRPr>
+            </a:pPr>
+            <a:r>
+              <a:t>⚡ 南屯大墩人文強烈威脅</a:t>
+            </a:r>
+          </a:p>
           <a:p>
             <a:pPr>
               <a:lnSpc>
                 <a:spcPct val="130000"/>
               </a:lnSpc>
-              <a:defRPr sz="1200">
+              <a:spcBef>
+                <a:spcPts val="1200"/>
+              </a:spcBef>
+              <a:defRPr sz="1100">
                 <a:solidFill>
                   <a:srgbClr val="1E293B"/>
                 </a:solidFill>
@@ -5760,16 +5212,16 @@
       </p:sp>
       <p:sp>
         <p:nvSpPr>
-          <p:cNvPr id="15" name="Rounded Rectangle 14"/>
+          <p:cNvPr id="10" name="Rectangle 9"/>
           <p:cNvSpPr/>
           <p:nvPr/>
         </p:nvSpPr>
         <p:spPr>
           <a:xfrm>
-            <a:off x="6217920" y="3931920"/>
-            <a:ext cx="5212080" cy="2377440"/>
-          </a:xfrm>
-          <a:prstGeom prst="roundRect">
+            <a:off x="8961120" y="1371600"/>
+            <a:ext cx="2514600" cy="4754880"/>
+          </a:xfrm>
+          <a:prstGeom prst="rect">
             <a:avLst/>
           </a:prstGeom>
           <a:solidFill>
@@ -5805,14 +5257,14 @@
       </p:sp>
       <p:sp>
         <p:nvSpPr>
-          <p:cNvPr id="16" name="TextBox 15"/>
+          <p:cNvPr id="11" name="TextBox 10"/>
           <p:cNvSpPr txBox="1"/>
           <p:nvPr/>
         </p:nvSpPr>
         <p:spPr>
           <a:xfrm>
-            <a:off x="6400800" y="4069080"/>
-            <a:ext cx="4846320" cy="457200"/>
+            <a:off x="9144000" y="1554480"/>
+            <a:ext cx="2148840" cy="4297680"/>
           </a:xfrm>
           <a:prstGeom prst="rect">
             <a:avLst/>
@@ -5820,52 +5272,32 @@
           <a:noFill/>
         </p:spPr>
         <p:txBody>
-          <a:bodyPr wrap="none">
-            <a:spAutoFit/>
-          </a:bodyPr>
-          <a:lstStyle/>
-          <a:p>
-            <a:pPr>
-              <a:defRPr sz="1600" b="1">
-                <a:solidFill>
-                  <a:srgbClr val="27AE60"/>
-                </a:solidFill>
-                <a:latin typeface="微軟正黑體"/>
-              </a:defRPr>
-            </a:pPr>
-            <a:r>
-              <a:t>🎯 把握稀缺中年自住買方</a:t>
-            </a:r>
-          </a:p>
-        </p:txBody>
-      </p:sp>
-      <p:sp>
-        <p:nvSpPr>
-          <p:cNvPr id="17" name="TextBox 16"/>
-          <p:cNvSpPr txBox="1"/>
-          <p:nvPr/>
-        </p:nvSpPr>
-        <p:spPr>
-          <a:xfrm>
-            <a:off x="6400800" y="4572000"/>
-            <a:ext cx="4846320" cy="1554480"/>
-          </a:xfrm>
-          <a:prstGeom prst="rect">
-            <a:avLst/>
-          </a:prstGeom>
-          <a:noFill/>
-        </p:spPr>
-        <p:txBody>
           <a:bodyPr wrap="square">
             <a:spAutoFit/>
           </a:bodyPr>
           <a:lstStyle/>
+          <a:p>
+            <a:pPr>
+              <a:defRPr sz="1400" b="1">
+                <a:solidFill>
+                  <a:srgbClr val="27AE60"/>
+                </a:solidFill>
+                <a:latin typeface="微軟正黑體"/>
+              </a:defRPr>
+            </a:pPr>
+            <a:r>
+              <a:t>🎯 把握稀缺中年自住買方</a:t>
+            </a:r>
+          </a:p>
           <a:p>
             <a:pPr>
               <a:lnSpc>
                 <a:spcPct val="130000"/>
               </a:lnSpc>
-              <a:defRPr sz="1200">
+              <a:spcBef>
+                <a:spcPts val="1200"/>
+              </a:spcBef>
+              <a:defRPr sz="1100">
                 <a:solidFill>
                   <a:srgbClr val="1E293B"/>
                 </a:solidFill>
@@ -5941,112 +5373,14 @@
       </p:sp>
       <p:sp>
         <p:nvSpPr>
-          <p:cNvPr id="3" name="Rectangle 2"/>
-          <p:cNvSpPr/>
-          <p:nvPr/>
-        </p:nvSpPr>
-        <p:spPr>
-          <a:xfrm>
-            <a:off x="0" y="0"/>
-            <a:ext cx="12191695" cy="109728"/>
-          </a:xfrm>
-          <a:prstGeom prst="rect">
-            <a:avLst/>
-          </a:prstGeom>
-          <a:solidFill>
-            <a:srgbClr val="1B365D"/>
-          </a:solidFill>
-          <a:ln>
-            <a:noFill/>
-          </a:ln>
-        </p:spPr>
-        <p:style>
-          <a:lnRef idx="1">
-            <a:schemeClr val="accent1"/>
-          </a:lnRef>
-          <a:fillRef idx="3">
-            <a:schemeClr val="accent1"/>
-          </a:fillRef>
-          <a:effectRef idx="2">
-            <a:schemeClr val="accent1"/>
-          </a:effectRef>
-          <a:fontRef idx="minor">
-            <a:schemeClr val="lt1"/>
-          </a:fontRef>
-        </p:style>
-        <p:txBody>
-          <a:bodyPr rtlCol="0" anchor="ctr"/>
-          <a:lstStyle/>
-          <a:p>
-            <a:pPr algn="ctr"/>
-          </a:p>
-        </p:txBody>
-      </p:sp>
-      <p:sp>
-        <p:nvSpPr>
-          <p:cNvPr id="4" name="Rounded Rectangle 3"/>
-          <p:cNvSpPr/>
-          <p:nvPr/>
-        </p:nvSpPr>
-        <p:spPr>
-          <a:xfrm>
-            <a:off x="731520" y="320040"/>
-            <a:ext cx="4114800" cy="292608"/>
-          </a:xfrm>
-          <a:prstGeom prst="roundRect">
-            <a:avLst/>
-          </a:prstGeom>
-          <a:solidFill>
-            <a:srgbClr val="EAF2FA"/>
-          </a:solidFill>
-          <a:ln w="12700">
-            <a:solidFill>
-              <a:srgbClr val="2C5E8A"/>
-            </a:solidFill>
-          </a:ln>
-        </p:spPr>
-        <p:style>
-          <a:lnRef idx="1">
-            <a:schemeClr val="accent1"/>
-          </a:lnRef>
-          <a:fillRef idx="3">
-            <a:schemeClr val="accent1"/>
-          </a:fillRef>
-          <a:effectRef idx="2">
-            <a:schemeClr val="accent1"/>
-          </a:effectRef>
-          <a:fontRef idx="minor">
-            <a:schemeClr val="lt1"/>
-          </a:fontRef>
-        </p:style>
-        <p:txBody>
-          <a:bodyPr rtlCol="0" anchor="ctr" wrap="square"/>
-          <a:lstStyle/>
-          <a:p>
-            <a:pPr algn="ctr">
-              <a:defRPr sz="1000" b="1">
-                <a:solidFill>
-                  <a:srgbClr val="2C5E8A"/>
-                </a:solidFill>
-                <a:latin typeface="微軟正黑體"/>
-              </a:defRPr>
-            </a:pPr>
-            <a:r>
-              <a:t>長億南園 8 樓・房仲向屋主議價溝通簡報</a:t>
-            </a:r>
-          </a:p>
-        </p:txBody>
-      </p:sp>
-      <p:sp>
-        <p:nvSpPr>
-          <p:cNvPr id="5" name="TextBox 4"/>
+          <p:cNvPr id="3" name="TextBox 2"/>
           <p:cNvSpPr txBox="1"/>
           <p:nvPr/>
         </p:nvSpPr>
         <p:spPr>
           <a:xfrm>
-            <a:off x="731520" y="621792"/>
-            <a:ext cx="10698480" cy="594360"/>
+            <a:off x="731520" y="365760"/>
+            <a:ext cx="10728655" cy="822960"/>
           </a:xfrm>
           <a:prstGeom prst="rect">
             <a:avLst/>
@@ -6054,12 +5388,28 @@
           <a:noFill/>
         </p:spPr>
         <p:txBody>
-          <a:bodyPr wrap="square">
+          <a:bodyPr wrap="square" lIns="0" tIns="0" rIns="0" bIns="0">
             <a:spAutoFit/>
           </a:bodyPr>
           <a:lstStyle/>
           <a:p>
             <a:pPr>
+              <a:defRPr sz="1000" b="1">
+                <a:solidFill>
+                  <a:srgbClr val="D98C14"/>
+                </a:solidFill>
+                <a:latin typeface="微軟正黑體"/>
+              </a:defRPr>
+            </a:pPr>
+            <a:r>
+              <a:t>長億南園 8 樓・房仲向屋主議價溝通簡報</a:t>
+            </a:r>
+          </a:p>
+          <a:p>
+            <a:pPr>
+              <a:spcBef>
+                <a:spcPts val="200"/>
+              </a:spcBef>
               <a:defRPr sz="2000" b="1">
                 <a:solidFill>
                   <a:srgbClr val="1B365D"/>
@@ -6075,7 +5425,7 @@
       </p:sp>
       <p:pic>
         <p:nvPicPr>
-          <p:cNvPr id="6" name="Picture 5" descr="00_台中市南區25年以上大型社區_大盤匯總走勢圖.png"/>
+          <p:cNvPr id="4" name="Picture 3" descr="00_台中市南區25年以上大型社區_大盤匯總走勢圖.png"/>
           <p:cNvPicPr>
             <a:picLocks noChangeAspect="1"/>
           </p:cNvPicPr>
@@ -6090,7 +5440,7 @@
         <p:spPr>
           <a:xfrm>
             <a:off x="731520" y="1371600"/>
-            <a:ext cx="6583680" cy="4487270"/>
+            <a:ext cx="6217920" cy="4754880"/>
           </a:xfrm>
           <a:prstGeom prst="rect">
             <a:avLst/>
@@ -6099,16 +5449,16 @@
       </p:pic>
       <p:sp>
         <p:nvSpPr>
-          <p:cNvPr id="7" name="Rounded Rectangle 6"/>
+          <p:cNvPr id="5" name="Rectangle 4"/>
           <p:cNvSpPr/>
           <p:nvPr/>
         </p:nvSpPr>
         <p:spPr>
           <a:xfrm>
-            <a:off x="7498079" y="1371600"/>
-            <a:ext cx="3931920" cy="5029200"/>
-          </a:xfrm>
-          <a:prstGeom prst="roundRect">
+            <a:off x="7132320" y="1371600"/>
+            <a:ext cx="4327855" cy="4754880"/>
+          </a:xfrm>
+          <a:prstGeom prst="rect">
             <a:avLst/>
           </a:prstGeom>
           <a:solidFill>
@@ -6144,14 +5494,14 @@
       </p:sp>
       <p:sp>
         <p:nvSpPr>
-          <p:cNvPr id="8" name="TextBox 7"/>
+          <p:cNvPr id="6" name="TextBox 5"/>
           <p:cNvSpPr txBox="1"/>
           <p:nvPr/>
         </p:nvSpPr>
         <p:spPr>
           <a:xfrm>
-            <a:off x="7680960" y="1554480"/>
-            <a:ext cx="3566160" cy="4663440"/>
+            <a:off x="7406640" y="1554480"/>
+            <a:ext cx="3779215" cy="4297680"/>
           </a:xfrm>
           <a:prstGeom prst="rect">
             <a:avLst/>
@@ -6183,7 +5533,7 @@
               </a:spcBef>
               <a:defRPr sz="1200" b="1">
                 <a:solidFill>
-                  <a:srgbClr val="C0392B"/>
+                  <a:srgbClr val="2C5E8A"/>
                 </a:solidFill>
                 <a:latin typeface="微軟正黑體"/>
               </a:defRPr>
@@ -6194,6 +5544,9 @@
           </a:p>
           <a:p>
             <a:pPr>
+              <a:spcBef>
+                <a:spcPts val="200"/>
+              </a:spcBef>
               <a:defRPr sz="1050">
                 <a:solidFill>
                   <a:srgbClr val="1E293B"/>
@@ -6212,7 +5565,7 @@
               </a:spcBef>
               <a:defRPr sz="1200" b="1">
                 <a:solidFill>
-                  <a:srgbClr val="C0392B"/>
+                  <a:srgbClr val="2C5E8A"/>
                 </a:solidFill>
                 <a:latin typeface="微軟正黑體"/>
               </a:defRPr>
@@ -6223,6 +5576,9 @@
           </a:p>
           <a:p>
             <a:pPr>
+              <a:spcBef>
+                <a:spcPts val="200"/>
+              </a:spcBef>
               <a:defRPr sz="1050">
                 <a:solidFill>
                   <a:srgbClr val="1E293B"/>
@@ -6252,6 +5608,9 @@
           </a:p>
           <a:p>
             <a:pPr>
+              <a:spcBef>
+                <a:spcPts val="200"/>
+              </a:spcBef>
               <a:defRPr sz="1050">
                 <a:solidFill>
                   <a:srgbClr val="1E293B"/>
@@ -6281,6 +5640,9 @@
           </a:p>
           <a:p>
             <a:pPr>
+              <a:spcBef>
+                <a:spcPts val="200"/>
+              </a:spcBef>
               <a:defRPr sz="1050">
                 <a:solidFill>
                   <a:srgbClr val="1E293B"/>
@@ -6357,112 +5719,14 @@
       </p:sp>
       <p:sp>
         <p:nvSpPr>
-          <p:cNvPr id="3" name="Rectangle 2"/>
-          <p:cNvSpPr/>
-          <p:nvPr/>
-        </p:nvSpPr>
-        <p:spPr>
-          <a:xfrm>
-            <a:off x="0" y="0"/>
-            <a:ext cx="12191695" cy="109728"/>
-          </a:xfrm>
-          <a:prstGeom prst="rect">
-            <a:avLst/>
-          </a:prstGeom>
-          <a:solidFill>
-            <a:srgbClr val="1B365D"/>
-          </a:solidFill>
-          <a:ln>
-            <a:noFill/>
-          </a:ln>
-        </p:spPr>
-        <p:style>
-          <a:lnRef idx="1">
-            <a:schemeClr val="accent1"/>
-          </a:lnRef>
-          <a:fillRef idx="3">
-            <a:schemeClr val="accent1"/>
-          </a:fillRef>
-          <a:effectRef idx="2">
-            <a:schemeClr val="accent1"/>
-          </a:effectRef>
-          <a:fontRef idx="minor">
-            <a:schemeClr val="lt1"/>
-          </a:fontRef>
-        </p:style>
-        <p:txBody>
-          <a:bodyPr rtlCol="0" anchor="ctr"/>
-          <a:lstStyle/>
-          <a:p>
-            <a:pPr algn="ctr"/>
-          </a:p>
-        </p:txBody>
-      </p:sp>
-      <p:sp>
-        <p:nvSpPr>
-          <p:cNvPr id="4" name="Rounded Rectangle 3"/>
-          <p:cNvSpPr/>
-          <p:nvPr/>
-        </p:nvSpPr>
-        <p:spPr>
-          <a:xfrm>
-            <a:off x="731520" y="320040"/>
-            <a:ext cx="4114800" cy="292608"/>
-          </a:xfrm>
-          <a:prstGeom prst="roundRect">
-            <a:avLst/>
-          </a:prstGeom>
-          <a:solidFill>
-            <a:srgbClr val="EAF2FA"/>
-          </a:solidFill>
-          <a:ln w="12700">
-            <a:solidFill>
-              <a:srgbClr val="2C5E8A"/>
-            </a:solidFill>
-          </a:ln>
-        </p:spPr>
-        <p:style>
-          <a:lnRef idx="1">
-            <a:schemeClr val="accent1"/>
-          </a:lnRef>
-          <a:fillRef idx="3">
-            <a:schemeClr val="accent1"/>
-          </a:fillRef>
-          <a:effectRef idx="2">
-            <a:schemeClr val="accent1"/>
-          </a:effectRef>
-          <a:fontRef idx="minor">
-            <a:schemeClr val="lt1"/>
-          </a:fontRef>
-        </p:style>
-        <p:txBody>
-          <a:bodyPr rtlCol="0" anchor="ctr" wrap="square"/>
-          <a:lstStyle/>
-          <a:p>
-            <a:pPr algn="ctr">
-              <a:defRPr sz="1000" b="1">
-                <a:solidFill>
-                  <a:srgbClr val="2C5E8A"/>
-                </a:solidFill>
-                <a:latin typeface="微軟正黑體"/>
-              </a:defRPr>
-            </a:pPr>
-            <a:r>
-              <a:t>長億南園 8 樓・房仲向屋主議價溝通簡報</a:t>
-            </a:r>
-          </a:p>
-        </p:txBody>
-      </p:sp>
-      <p:sp>
-        <p:nvSpPr>
-          <p:cNvPr id="5" name="TextBox 4"/>
+          <p:cNvPr id="3" name="TextBox 2"/>
           <p:cNvSpPr txBox="1"/>
           <p:nvPr/>
         </p:nvSpPr>
         <p:spPr>
           <a:xfrm>
-            <a:off x="731520" y="621792"/>
-            <a:ext cx="10698480" cy="594360"/>
+            <a:off x="731520" y="365760"/>
+            <a:ext cx="10728655" cy="822960"/>
           </a:xfrm>
           <a:prstGeom prst="rect">
             <a:avLst/>
@@ -6470,12 +5734,28 @@
           <a:noFill/>
         </p:spPr>
         <p:txBody>
-          <a:bodyPr wrap="square">
+          <a:bodyPr wrap="square" lIns="0" tIns="0" rIns="0" bIns="0">
             <a:spAutoFit/>
           </a:bodyPr>
           <a:lstStyle/>
           <a:p>
             <a:pPr>
+              <a:defRPr sz="1000" b="1">
+                <a:solidFill>
+                  <a:srgbClr val="D98C14"/>
+                </a:solidFill>
+                <a:latin typeface="微軟正黑體"/>
+              </a:defRPr>
+            </a:pPr>
+            <a:r>
+              <a:t>長億南園 8 樓・房仲向屋主議價溝通簡報</a:t>
+            </a:r>
+          </a:p>
+          <a:p>
+            <a:pPr>
+              <a:spcBef>
+                <a:spcPts val="200"/>
+              </a:spcBef>
               <a:defRPr sz="2000" b="1">
                 <a:solidFill>
                   <a:srgbClr val="1B365D"/>
@@ -6491,16 +5771,16 @@
       </p:sp>
       <p:sp>
         <p:nvSpPr>
-          <p:cNvPr id="6" name="Rounded Rectangle 5"/>
+          <p:cNvPr id="4" name="Rectangle 3"/>
           <p:cNvSpPr/>
           <p:nvPr/>
         </p:nvSpPr>
         <p:spPr>
           <a:xfrm>
             <a:off x="731520" y="1371600"/>
-            <a:ext cx="3383280" cy="4846320"/>
-          </a:xfrm>
-          <a:prstGeom prst="roundRect">
+            <a:ext cx="3383280" cy="4754880"/>
+          </a:xfrm>
+          <a:prstGeom prst="rect">
             <a:avLst/>
           </a:prstGeom>
           <a:solidFill>
@@ -6536,14 +5816,14 @@
       </p:sp>
       <p:sp>
         <p:nvSpPr>
-          <p:cNvPr id="7" name="TextBox 6"/>
+          <p:cNvPr id="5" name="TextBox 4"/>
           <p:cNvSpPr txBox="1"/>
           <p:nvPr/>
         </p:nvSpPr>
         <p:spPr>
           <a:xfrm>
             <a:off x="914400" y="1554480"/>
-            <a:ext cx="3017520" cy="4480560"/>
+            <a:ext cx="3017520" cy="4297680"/>
           </a:xfrm>
           <a:prstGeom prst="rect">
             <a:avLst/>
@@ -6559,7 +5839,7 @@
             <a:pPr>
               <a:defRPr sz="1400" b="1">
                 <a:solidFill>
-                  <a:srgbClr val="1B365D"/>
+                  <a:srgbClr val="C0392B"/>
                 </a:solidFill>
                 <a:latin typeface="微軟正黑體"/>
               </a:defRPr>
@@ -6574,7 +5854,7 @@
                 <a:spcPct val="130000"/>
               </a:lnSpc>
               <a:spcBef>
-                <a:spcPts val="1000"/>
+                <a:spcPts val="1200"/>
               </a:spcBef>
               <a:defRPr sz="1100">
                 <a:solidFill>
@@ -6599,16 +5879,16 @@
       </p:sp>
       <p:sp>
         <p:nvSpPr>
-          <p:cNvPr id="8" name="Rounded Rectangle 7"/>
+          <p:cNvPr id="6" name="Rectangle 5"/>
           <p:cNvSpPr/>
           <p:nvPr/>
         </p:nvSpPr>
         <p:spPr>
           <a:xfrm>
             <a:off x="4389120" y="1371600"/>
-            <a:ext cx="3383280" cy="4846320"/>
-          </a:xfrm>
-          <a:prstGeom prst="roundRect">
+            <a:ext cx="3383280" cy="4754880"/>
+          </a:xfrm>
+          <a:prstGeom prst="rect">
             <a:avLst/>
           </a:prstGeom>
           <a:solidFill>
@@ -6644,14 +5924,14 @@
       </p:sp>
       <p:sp>
         <p:nvSpPr>
-          <p:cNvPr id="9" name="TextBox 8"/>
+          <p:cNvPr id="7" name="TextBox 6"/>
           <p:cNvSpPr txBox="1"/>
           <p:nvPr/>
         </p:nvSpPr>
         <p:spPr>
           <a:xfrm>
             <a:off x="4572000" y="1554480"/>
-            <a:ext cx="3017520" cy="4480560"/>
+            <a:ext cx="3017520" cy="4297680"/>
           </a:xfrm>
           <a:prstGeom prst="rect">
             <a:avLst/>
@@ -6667,7 +5947,7 @@
             <a:pPr>
               <a:defRPr sz="1400" b="1">
                 <a:solidFill>
-                  <a:srgbClr val="1B365D"/>
+                  <a:srgbClr val="D98C14"/>
                 </a:solidFill>
                 <a:latin typeface="微軟正黑體"/>
               </a:defRPr>
@@ -6682,7 +5962,7 @@
                 <a:spcPct val="130000"/>
               </a:lnSpc>
               <a:spcBef>
-                <a:spcPts val="1000"/>
+                <a:spcPts val="1200"/>
               </a:spcBef>
               <a:defRPr sz="1100">
                 <a:solidFill>
@@ -6707,16 +5987,16 @@
       </p:sp>
       <p:sp>
         <p:nvSpPr>
-          <p:cNvPr id="10" name="Rounded Rectangle 9"/>
+          <p:cNvPr id="8" name="Rectangle 7"/>
           <p:cNvSpPr/>
           <p:nvPr/>
         </p:nvSpPr>
         <p:spPr>
           <a:xfrm>
             <a:off x="8046720" y="1371600"/>
-            <a:ext cx="3383280" cy="4846320"/>
-          </a:xfrm>
-          <a:prstGeom prst="roundRect">
+            <a:ext cx="3383280" cy="4754880"/>
+          </a:xfrm>
+          <a:prstGeom prst="rect">
             <a:avLst/>
           </a:prstGeom>
           <a:solidFill>
@@ -6752,14 +6032,14 @@
       </p:sp>
       <p:sp>
         <p:nvSpPr>
-          <p:cNvPr id="11" name="TextBox 10"/>
+          <p:cNvPr id="9" name="TextBox 8"/>
           <p:cNvSpPr txBox="1"/>
           <p:nvPr/>
         </p:nvSpPr>
         <p:spPr>
           <a:xfrm>
             <a:off x="8229600" y="1554480"/>
-            <a:ext cx="3017520" cy="4480560"/>
+            <a:ext cx="3017520" cy="4297680"/>
           </a:xfrm>
           <a:prstGeom prst="rect">
             <a:avLst/>
@@ -6790,7 +6070,7 @@
                 <a:spcPct val="130000"/>
               </a:lnSpc>
               <a:spcBef>
-                <a:spcPts val="1000"/>
+                <a:spcPts val="1200"/>
               </a:spcBef>
               <a:defRPr sz="1100">
                 <a:solidFill>
@@ -6804,15 +6084,15 @@
             </a:r>
             <a:br/>
             <a:r>
-              <a:t>  - 116 年下探：21.1 萬/坪</a:t>
+              <a:t>   - 116 年下探：21.1 萬/坪</a:t>
             </a:r>
             <a:br/>
             <a:r>
-              <a:t>  - 117 年下探：18.0 萬/坪</a:t>
+              <a:t>   - 117 年下探：18.0 萬/坪</a:t>
             </a:r>
             <a:br/>
             <a:r>
-              <a:t>  - 118 年回測歷史支撐：15.8 萬/坪</a:t>
+              <a:t>   - 118 年回測歷史支撐：15.8 萬/坪</a:t>
             </a:r>
             <a:br/>
             <a:r>
@@ -6884,112 +6164,14 @@
       </p:sp>
       <p:sp>
         <p:nvSpPr>
-          <p:cNvPr id="3" name="Rectangle 2"/>
-          <p:cNvSpPr/>
-          <p:nvPr/>
-        </p:nvSpPr>
-        <p:spPr>
-          <a:xfrm>
-            <a:off x="0" y="0"/>
-            <a:ext cx="12191695" cy="109728"/>
-          </a:xfrm>
-          <a:prstGeom prst="rect">
-            <a:avLst/>
-          </a:prstGeom>
-          <a:solidFill>
-            <a:srgbClr val="1B365D"/>
-          </a:solidFill>
-          <a:ln>
-            <a:noFill/>
-          </a:ln>
-        </p:spPr>
-        <p:style>
-          <a:lnRef idx="1">
-            <a:schemeClr val="accent1"/>
-          </a:lnRef>
-          <a:fillRef idx="3">
-            <a:schemeClr val="accent1"/>
-          </a:fillRef>
-          <a:effectRef idx="2">
-            <a:schemeClr val="accent1"/>
-          </a:effectRef>
-          <a:fontRef idx="minor">
-            <a:schemeClr val="lt1"/>
-          </a:fontRef>
-        </p:style>
-        <p:txBody>
-          <a:bodyPr rtlCol="0" anchor="ctr"/>
-          <a:lstStyle/>
-          <a:p>
-            <a:pPr algn="ctr"/>
-          </a:p>
-        </p:txBody>
-      </p:sp>
-      <p:sp>
-        <p:nvSpPr>
-          <p:cNvPr id="4" name="Rounded Rectangle 3"/>
-          <p:cNvSpPr/>
-          <p:nvPr/>
-        </p:nvSpPr>
-        <p:spPr>
-          <a:xfrm>
-            <a:off x="731520" y="320040"/>
-            <a:ext cx="4114800" cy="292608"/>
-          </a:xfrm>
-          <a:prstGeom prst="roundRect">
-            <a:avLst/>
-          </a:prstGeom>
-          <a:solidFill>
-            <a:srgbClr val="EAF2FA"/>
-          </a:solidFill>
-          <a:ln w="12700">
-            <a:solidFill>
-              <a:srgbClr val="2C5E8A"/>
-            </a:solidFill>
-          </a:ln>
-        </p:spPr>
-        <p:style>
-          <a:lnRef idx="1">
-            <a:schemeClr val="accent1"/>
-          </a:lnRef>
-          <a:fillRef idx="3">
-            <a:schemeClr val="accent1"/>
-          </a:fillRef>
-          <a:effectRef idx="2">
-            <a:schemeClr val="accent1"/>
-          </a:effectRef>
-          <a:fontRef idx="minor">
-            <a:schemeClr val="lt1"/>
-          </a:fontRef>
-        </p:style>
-        <p:txBody>
-          <a:bodyPr rtlCol="0" anchor="ctr" wrap="square"/>
-          <a:lstStyle/>
-          <a:p>
-            <a:pPr algn="ctr">
-              <a:defRPr sz="1000" b="1">
-                <a:solidFill>
-                  <a:srgbClr val="2C5E8A"/>
-                </a:solidFill>
-                <a:latin typeface="微軟正黑體"/>
-              </a:defRPr>
-            </a:pPr>
-            <a:r>
-              <a:t>長億南園 8 樓・房仲向屋主議價溝通簡報</a:t>
-            </a:r>
-          </a:p>
-        </p:txBody>
-      </p:sp>
-      <p:sp>
-        <p:nvSpPr>
-          <p:cNvPr id="5" name="TextBox 4"/>
+          <p:cNvPr id="3" name="TextBox 2"/>
           <p:cNvSpPr txBox="1"/>
           <p:nvPr/>
         </p:nvSpPr>
         <p:spPr>
           <a:xfrm>
-            <a:off x="731520" y="621792"/>
-            <a:ext cx="10698480" cy="594360"/>
+            <a:off x="731520" y="365760"/>
+            <a:ext cx="10728655" cy="822960"/>
           </a:xfrm>
           <a:prstGeom prst="rect">
             <a:avLst/>
@@ -6997,12 +6179,28 @@
           <a:noFill/>
         </p:spPr>
         <p:txBody>
-          <a:bodyPr wrap="square">
+          <a:bodyPr wrap="square" lIns="0" tIns="0" rIns="0" bIns="0">
             <a:spAutoFit/>
           </a:bodyPr>
           <a:lstStyle/>
           <a:p>
             <a:pPr>
+              <a:defRPr sz="1000" b="1">
+                <a:solidFill>
+                  <a:srgbClr val="D98C14"/>
+                </a:solidFill>
+                <a:latin typeface="微軟正黑體"/>
+              </a:defRPr>
+            </a:pPr>
+            <a:r>
+              <a:t>長億南園 8 樓・房仲向屋主議價溝通簡報</a:t>
+            </a:r>
+          </a:p>
+          <a:p>
+            <a:pPr>
+              <a:spcBef>
+                <a:spcPts val="200"/>
+              </a:spcBef>
               <a:defRPr sz="2000" b="1">
                 <a:solidFill>
                   <a:srgbClr val="1B365D"/>
@@ -7018,7 +6216,7 @@
       </p:sp>
       <p:pic>
         <p:nvPicPr>
-          <p:cNvPr id="6" name="Picture 5" descr="28_長億南園_成交行情走勢圖.png"/>
+          <p:cNvPr id="4" name="Picture 3" descr="28_長億南園_成交行情走勢圖.png"/>
           <p:cNvPicPr>
             <a:picLocks noChangeAspect="1"/>
           </p:cNvPicPr>
@@ -7033,7 +6231,7 @@
         <p:spPr>
           <a:xfrm>
             <a:off x="731520" y="1371600"/>
-            <a:ext cx="6583680" cy="4591428"/>
+            <a:ext cx="6217920" cy="4754880"/>
           </a:xfrm>
           <a:prstGeom prst="rect">
             <a:avLst/>
@@ -7042,16 +6240,16 @@
       </p:pic>
       <p:sp>
         <p:nvSpPr>
-          <p:cNvPr id="7" name="Rounded Rectangle 6"/>
+          <p:cNvPr id="5" name="Rectangle 4"/>
           <p:cNvSpPr/>
           <p:nvPr/>
         </p:nvSpPr>
         <p:spPr>
           <a:xfrm>
-            <a:off x="7498079" y="1371600"/>
-            <a:ext cx="3931920" cy="5029200"/>
-          </a:xfrm>
-          <a:prstGeom prst="roundRect">
+            <a:off x="7132320" y="1371600"/>
+            <a:ext cx="4327855" cy="4754880"/>
+          </a:xfrm>
+          <a:prstGeom prst="rect">
             <a:avLst/>
           </a:prstGeom>
           <a:solidFill>
@@ -7087,14 +6285,14 @@
       </p:sp>
       <p:sp>
         <p:nvSpPr>
-          <p:cNvPr id="8" name="TextBox 7"/>
+          <p:cNvPr id="6" name="TextBox 5"/>
           <p:cNvSpPr txBox="1"/>
           <p:nvPr/>
         </p:nvSpPr>
         <p:spPr>
           <a:xfrm>
-            <a:off x="7680960" y="1554480"/>
-            <a:ext cx="3566160" cy="4663440"/>
+            <a:off x="7406640" y="1554480"/>
+            <a:ext cx="3779215" cy="4297680"/>
           </a:xfrm>
           <a:prstGeom prst="rect">
             <a:avLst/>
@@ -7126,7 +6324,7 @@
               </a:spcBef>
               <a:defRPr sz="1200" b="1">
                 <a:solidFill>
-                  <a:srgbClr val="C0392B"/>
+                  <a:srgbClr val="2C5E8A"/>
                 </a:solidFill>
                 <a:latin typeface="微軟正黑體"/>
               </a:defRPr>
@@ -7137,6 +6335,9 @@
           </a:p>
           <a:p>
             <a:pPr>
+              <a:spcBef>
+                <a:spcPts val="200"/>
+              </a:spcBef>
               <a:defRPr sz="1050">
                 <a:solidFill>
                   <a:srgbClr val="1E293B"/>
@@ -7166,6 +6367,9 @@
           </a:p>
           <a:p>
             <a:pPr>
+              <a:spcBef>
+                <a:spcPts val="200"/>
+              </a:spcBef>
               <a:defRPr sz="1050">
                 <a:solidFill>
                   <a:srgbClr val="1E293B"/>
@@ -7184,7 +6388,7 @@
               </a:spcBef>
               <a:defRPr sz="1200" b="1">
                 <a:solidFill>
-                  <a:srgbClr val="C0392B"/>
+                  <a:srgbClr val="2C5E8A"/>
                 </a:solidFill>
                 <a:latin typeface="微軟正黑體"/>
               </a:defRPr>
@@ -7195,6 +6399,9 @@
           </a:p>
           <a:p>
             <a:pPr>
+              <a:spcBef>
+                <a:spcPts val="200"/>
+              </a:spcBef>
               <a:defRPr sz="1050">
                 <a:solidFill>
                   <a:srgbClr val="1E293B"/>
@@ -7213,7 +6420,7 @@
               </a:spcBef>
               <a:defRPr sz="1200" b="1">
                 <a:solidFill>
-                  <a:srgbClr val="C0392B"/>
+                  <a:srgbClr val="2C5E8A"/>
                 </a:solidFill>
                 <a:latin typeface="微軟正黑體"/>
               </a:defRPr>
@@ -7224,6 +6431,9 @@
           </a:p>
           <a:p>
             <a:pPr>
+              <a:spcBef>
+                <a:spcPts val="200"/>
+              </a:spcBef>
               <a:defRPr sz="1050">
                 <a:solidFill>
                   <a:srgbClr val="1E293B"/>
@@ -7300,112 +6510,14 @@
       </p:sp>
       <p:sp>
         <p:nvSpPr>
-          <p:cNvPr id="3" name="Rectangle 2"/>
-          <p:cNvSpPr/>
-          <p:nvPr/>
-        </p:nvSpPr>
-        <p:spPr>
-          <a:xfrm>
-            <a:off x="0" y="0"/>
-            <a:ext cx="12191695" cy="109728"/>
-          </a:xfrm>
-          <a:prstGeom prst="rect">
-            <a:avLst/>
-          </a:prstGeom>
-          <a:solidFill>
-            <a:srgbClr val="1B365D"/>
-          </a:solidFill>
-          <a:ln>
-            <a:noFill/>
-          </a:ln>
-        </p:spPr>
-        <p:style>
-          <a:lnRef idx="1">
-            <a:schemeClr val="accent1"/>
-          </a:lnRef>
-          <a:fillRef idx="3">
-            <a:schemeClr val="accent1"/>
-          </a:fillRef>
-          <a:effectRef idx="2">
-            <a:schemeClr val="accent1"/>
-          </a:effectRef>
-          <a:fontRef idx="minor">
-            <a:schemeClr val="lt1"/>
-          </a:fontRef>
-        </p:style>
-        <p:txBody>
-          <a:bodyPr rtlCol="0" anchor="ctr"/>
-          <a:lstStyle/>
-          <a:p>
-            <a:pPr algn="ctr"/>
-          </a:p>
-        </p:txBody>
-      </p:sp>
-      <p:sp>
-        <p:nvSpPr>
-          <p:cNvPr id="4" name="Rounded Rectangle 3"/>
-          <p:cNvSpPr/>
-          <p:nvPr/>
-        </p:nvSpPr>
-        <p:spPr>
-          <a:xfrm>
-            <a:off x="731520" y="320040"/>
-            <a:ext cx="4114800" cy="292608"/>
-          </a:xfrm>
-          <a:prstGeom prst="roundRect">
-            <a:avLst/>
-          </a:prstGeom>
-          <a:solidFill>
-            <a:srgbClr val="EAF2FA"/>
-          </a:solidFill>
-          <a:ln w="12700">
-            <a:solidFill>
-              <a:srgbClr val="2C5E8A"/>
-            </a:solidFill>
-          </a:ln>
-        </p:spPr>
-        <p:style>
-          <a:lnRef idx="1">
-            <a:schemeClr val="accent1"/>
-          </a:lnRef>
-          <a:fillRef idx="3">
-            <a:schemeClr val="accent1"/>
-          </a:fillRef>
-          <a:effectRef idx="2">
-            <a:schemeClr val="accent1"/>
-          </a:effectRef>
-          <a:fontRef idx="minor">
-            <a:schemeClr val="lt1"/>
-          </a:fontRef>
-        </p:style>
-        <p:txBody>
-          <a:bodyPr rtlCol="0" anchor="ctr" wrap="square"/>
-          <a:lstStyle/>
-          <a:p>
-            <a:pPr algn="ctr">
-              <a:defRPr sz="1000" b="1">
-                <a:solidFill>
-                  <a:srgbClr val="2C5E8A"/>
-                </a:solidFill>
-                <a:latin typeface="微軟正黑體"/>
-              </a:defRPr>
-            </a:pPr>
-            <a:r>
-              <a:t>長億南園 8 樓・房仲向屋主議價溝通簡報</a:t>
-            </a:r>
-          </a:p>
-        </p:txBody>
-      </p:sp>
-      <p:sp>
-        <p:nvSpPr>
-          <p:cNvPr id="5" name="TextBox 4"/>
+          <p:cNvPr id="3" name="TextBox 2"/>
           <p:cNvSpPr txBox="1"/>
           <p:nvPr/>
         </p:nvSpPr>
         <p:spPr>
           <a:xfrm>
-            <a:off x="731520" y="621792"/>
-            <a:ext cx="10698480" cy="594360"/>
+            <a:off x="731520" y="365760"/>
+            <a:ext cx="10728655" cy="822960"/>
           </a:xfrm>
           <a:prstGeom prst="rect">
             <a:avLst/>
@@ -7413,12 +6525,28 @@
           <a:noFill/>
         </p:spPr>
         <p:txBody>
-          <a:bodyPr wrap="square">
+          <a:bodyPr wrap="square" lIns="0" tIns="0" rIns="0" bIns="0">
             <a:spAutoFit/>
           </a:bodyPr>
           <a:lstStyle/>
           <a:p>
             <a:pPr>
+              <a:defRPr sz="1000" b="1">
+                <a:solidFill>
+                  <a:srgbClr val="D98C14"/>
+                </a:solidFill>
+                <a:latin typeface="微軟正黑體"/>
+              </a:defRPr>
+            </a:pPr>
+            <a:r>
+              <a:t>長億南園 8 樓・房仲向屋主議價溝通簡報</a:t>
+            </a:r>
+          </a:p>
+          <a:p>
+            <a:pPr>
+              <a:spcBef>
+                <a:spcPts val="200"/>
+              </a:spcBef>
               <a:defRPr sz="2000" b="1">
                 <a:solidFill>
                   <a:srgbClr val="1B365D"/>
@@ -7434,14 +6562,14 @@
       </p:sp>
       <p:graphicFrame>
         <p:nvGraphicFramePr>
-          <p:cNvPr id="6" name="Table 5"/>
+          <p:cNvPr id="4" name="Table 3"/>
           <p:cNvGraphicFramePr>
             <a:graphicFrameLocks noGrp="1"/>
           </p:cNvGraphicFramePr>
           <p:nvPr/>
         </p:nvGraphicFramePr>
         <p:xfrm>
-          <a:off x="731520" y="1463040"/>
+          <a:off x="731520" y="1371600"/>
           <a:ext cx="10728655" cy="3657600"/>
         </p:xfrm>
         <a:graphic>
@@ -7451,10 +6579,10 @@
                 <a:tableStyleId>{5C22544A-7EE6-4342-B048-85BDC9FD1C3A}</a:tableStyleId>
               </a:tblPr>
               <a:tblGrid>
+                <a:gridCol w="2103120"/>
+                <a:gridCol w="2103120"/>
                 <a:gridCol w="1645920"/>
-                <a:gridCol w="2011680"/>
-                <a:gridCol w="2011680"/>
-                <a:gridCol w="2286000"/>
+                <a:gridCol w="2103120"/>
                 <a:gridCol w="2773375"/>
               </a:tblGrid>
               <a:tr h="731520">
@@ -8121,7 +7249,7 @@
       </p:graphicFrame>
       <p:sp>
         <p:nvSpPr>
-          <p:cNvPr id="7" name="TextBox 6"/>
+          <p:cNvPr id="5" name="TextBox 4"/>
           <p:cNvSpPr txBox="1"/>
           <p:nvPr/>
         </p:nvSpPr>
@@ -8150,7 +7278,11 @@
               </a:defRPr>
             </a:pPr>
             <a:r>
-              <a:t>💡 房仲核心建言：同社區即有 4 戶在售，附近社區類似總價物件總計更有數十戶同時銷售！「誰先適度讓利，誰就能先把數百萬現金抱回家」！堅持高價只會變成替其他物件做免費抬轎。</a:t>
+              <a:t>💡 房仲核心建言：同社區即有 4 戶在售，附近社區類似總價物件總計更有數十戶同時銷售！「誰先適度讓利，誰就能先把數百萬現金抱回家」！</a:t>
+            </a:r>
+            <a:br/>
+            <a:r>
+              <a:t>堅持高價只會變成替其他物件做免費抬轎。</a:t>
             </a:r>
           </a:p>
         </p:txBody>
@@ -8218,112 +7350,14 @@
       </p:sp>
       <p:sp>
         <p:nvSpPr>
-          <p:cNvPr id="3" name="Rectangle 2"/>
-          <p:cNvSpPr/>
-          <p:nvPr/>
-        </p:nvSpPr>
-        <p:spPr>
-          <a:xfrm>
-            <a:off x="0" y="0"/>
-            <a:ext cx="12191695" cy="109728"/>
-          </a:xfrm>
-          <a:prstGeom prst="rect">
-            <a:avLst/>
-          </a:prstGeom>
-          <a:solidFill>
-            <a:srgbClr val="1B365D"/>
-          </a:solidFill>
-          <a:ln>
-            <a:noFill/>
-          </a:ln>
-        </p:spPr>
-        <p:style>
-          <a:lnRef idx="1">
-            <a:schemeClr val="accent1"/>
-          </a:lnRef>
-          <a:fillRef idx="3">
-            <a:schemeClr val="accent1"/>
-          </a:fillRef>
-          <a:effectRef idx="2">
-            <a:schemeClr val="accent1"/>
-          </a:effectRef>
-          <a:fontRef idx="minor">
-            <a:schemeClr val="lt1"/>
-          </a:fontRef>
-        </p:style>
-        <p:txBody>
-          <a:bodyPr rtlCol="0" anchor="ctr"/>
-          <a:lstStyle/>
-          <a:p>
-            <a:pPr algn="ctr"/>
-          </a:p>
-        </p:txBody>
-      </p:sp>
-      <p:sp>
-        <p:nvSpPr>
-          <p:cNvPr id="4" name="Rounded Rectangle 3"/>
-          <p:cNvSpPr/>
-          <p:nvPr/>
-        </p:nvSpPr>
-        <p:spPr>
-          <a:xfrm>
-            <a:off x="731520" y="320040"/>
-            <a:ext cx="4114800" cy="292608"/>
-          </a:xfrm>
-          <a:prstGeom prst="roundRect">
-            <a:avLst/>
-          </a:prstGeom>
-          <a:solidFill>
-            <a:srgbClr val="EAF2FA"/>
-          </a:solidFill>
-          <a:ln w="12700">
-            <a:solidFill>
-              <a:srgbClr val="2C5E8A"/>
-            </a:solidFill>
-          </a:ln>
-        </p:spPr>
-        <p:style>
-          <a:lnRef idx="1">
-            <a:schemeClr val="accent1"/>
-          </a:lnRef>
-          <a:fillRef idx="3">
-            <a:schemeClr val="accent1"/>
-          </a:fillRef>
-          <a:effectRef idx="2">
-            <a:schemeClr val="accent1"/>
-          </a:effectRef>
-          <a:fontRef idx="minor">
-            <a:schemeClr val="lt1"/>
-          </a:fontRef>
-        </p:style>
-        <p:txBody>
-          <a:bodyPr rtlCol="0" anchor="ctr" wrap="square"/>
-          <a:lstStyle/>
-          <a:p>
-            <a:pPr algn="ctr">
-              <a:defRPr sz="1000" b="1">
-                <a:solidFill>
-                  <a:srgbClr val="2C5E8A"/>
-                </a:solidFill>
-                <a:latin typeface="微軟正黑體"/>
-              </a:defRPr>
-            </a:pPr>
-            <a:r>
-              <a:t>長億南園 8 樓・房仲向屋主議價溝通簡報</a:t>
-            </a:r>
-          </a:p>
-        </p:txBody>
-      </p:sp>
-      <p:sp>
-        <p:nvSpPr>
-          <p:cNvPr id="5" name="TextBox 4"/>
+          <p:cNvPr id="3" name="TextBox 2"/>
           <p:cNvSpPr txBox="1"/>
           <p:nvPr/>
         </p:nvSpPr>
         <p:spPr>
           <a:xfrm>
-            <a:off x="731520" y="621792"/>
-            <a:ext cx="10698480" cy="594360"/>
+            <a:off x="731520" y="365760"/>
+            <a:ext cx="10728655" cy="822960"/>
           </a:xfrm>
           <a:prstGeom prst="rect">
             <a:avLst/>
@@ -8331,12 +7365,28 @@
           <a:noFill/>
         </p:spPr>
         <p:txBody>
-          <a:bodyPr wrap="square">
+          <a:bodyPr wrap="square" lIns="0" tIns="0" rIns="0" bIns="0">
             <a:spAutoFit/>
           </a:bodyPr>
           <a:lstStyle/>
           <a:p>
             <a:pPr>
+              <a:defRPr sz="1000" b="1">
+                <a:solidFill>
+                  <a:srgbClr val="D98C14"/>
+                </a:solidFill>
+                <a:latin typeface="微軟正黑體"/>
+              </a:defRPr>
+            </a:pPr>
+            <a:r>
+              <a:t>長億南園 8 樓・房仲向屋主議價溝通簡報</a:t>
+            </a:r>
+          </a:p>
+          <a:p>
+            <a:pPr>
+              <a:spcBef>
+                <a:spcPts val="200"/>
+              </a:spcBef>
               <a:defRPr sz="2000" b="1">
                 <a:solidFill>
                   <a:srgbClr val="1B365D"/>
@@ -8352,7 +7402,7 @@
       </p:sp>
       <p:sp>
         <p:nvSpPr>
-          <p:cNvPr id="6" name="Rounded Rectangle 5"/>
+          <p:cNvPr id="4" name="Rectangle 3"/>
           <p:cNvSpPr/>
           <p:nvPr/>
         </p:nvSpPr>
@@ -8361,7 +7411,7 @@
             <a:off x="731520" y="1371600"/>
             <a:ext cx="5212080" cy="4754880"/>
           </a:xfrm>
-          <a:prstGeom prst="roundRect">
+          <a:prstGeom prst="rect">
             <a:avLst/>
           </a:prstGeom>
           <a:solidFill>
@@ -8397,7 +7447,7 @@
       </p:sp>
       <p:sp>
         <p:nvSpPr>
-          <p:cNvPr id="7" name="TextBox 6"/>
+          <p:cNvPr id="5" name="TextBox 4"/>
           <p:cNvSpPr txBox="1"/>
           <p:nvPr/>
         </p:nvSpPr>
@@ -8460,7 +7510,7 @@
       </p:sp>
       <p:sp>
         <p:nvSpPr>
-          <p:cNvPr id="8" name="Rounded Rectangle 7"/>
+          <p:cNvPr id="6" name="Rectangle 5"/>
           <p:cNvSpPr/>
           <p:nvPr/>
         </p:nvSpPr>
@@ -8469,7 +7519,7 @@
             <a:off x="6217920" y="1371600"/>
             <a:ext cx="5212080" cy="4754880"/>
           </a:xfrm>
-          <a:prstGeom prst="roundRect">
+          <a:prstGeom prst="rect">
             <a:avLst/>
           </a:prstGeom>
           <a:solidFill>
@@ -8505,7 +7555,7 @@
       </p:sp>
       <p:sp>
         <p:nvSpPr>
-          <p:cNvPr id="9" name="TextBox 8"/>
+          <p:cNvPr id="7" name="TextBox 6"/>
           <p:cNvSpPr txBox="1"/>
           <p:nvPr/>
         </p:nvSpPr>
@@ -8557,7 +7607,7 @@
             </a:r>
             <a:br/>
             <a:r>
-              <a:t>• 買方直言：『在目前 800、900 萬價位，市場上完全可以挑到 921 震後興建、耐震法規提升的中古大樓，對地震疑慮完全消除！』</a:t>
+              <a:t>• 買方直言：『在目前 800、900 萬價位，市場上完全可以挑到 921 震後興建、耐震法規提升的中古大樓(大慶國宅)，對地震疑慮完全消除！』，買方對大慶國宅亦展現高度興趣。</a:t>
             </a:r>
             <a:br/>
             <a:r>
@@ -8629,112 +7679,14 @@
       </p:sp>
       <p:sp>
         <p:nvSpPr>
-          <p:cNvPr id="3" name="Rectangle 2"/>
-          <p:cNvSpPr/>
-          <p:nvPr/>
-        </p:nvSpPr>
-        <p:spPr>
-          <a:xfrm>
-            <a:off x="0" y="0"/>
-            <a:ext cx="12191695" cy="109728"/>
-          </a:xfrm>
-          <a:prstGeom prst="rect">
-            <a:avLst/>
-          </a:prstGeom>
-          <a:solidFill>
-            <a:srgbClr val="1B365D"/>
-          </a:solidFill>
-          <a:ln>
-            <a:noFill/>
-          </a:ln>
-        </p:spPr>
-        <p:style>
-          <a:lnRef idx="1">
-            <a:schemeClr val="accent1"/>
-          </a:lnRef>
-          <a:fillRef idx="3">
-            <a:schemeClr val="accent1"/>
-          </a:fillRef>
-          <a:effectRef idx="2">
-            <a:schemeClr val="accent1"/>
-          </a:effectRef>
-          <a:fontRef idx="minor">
-            <a:schemeClr val="lt1"/>
-          </a:fontRef>
-        </p:style>
-        <p:txBody>
-          <a:bodyPr rtlCol="0" anchor="ctr"/>
-          <a:lstStyle/>
-          <a:p>
-            <a:pPr algn="ctr"/>
-          </a:p>
-        </p:txBody>
-      </p:sp>
-      <p:sp>
-        <p:nvSpPr>
-          <p:cNvPr id="4" name="Rounded Rectangle 3"/>
-          <p:cNvSpPr/>
-          <p:nvPr/>
-        </p:nvSpPr>
-        <p:spPr>
-          <a:xfrm>
-            <a:off x="731520" y="320040"/>
-            <a:ext cx="4114800" cy="292608"/>
-          </a:xfrm>
-          <a:prstGeom prst="roundRect">
-            <a:avLst/>
-          </a:prstGeom>
-          <a:solidFill>
-            <a:srgbClr val="EAF2FA"/>
-          </a:solidFill>
-          <a:ln w="12700">
-            <a:solidFill>
-              <a:srgbClr val="2C5E8A"/>
-            </a:solidFill>
-          </a:ln>
-        </p:spPr>
-        <p:style>
-          <a:lnRef idx="1">
-            <a:schemeClr val="accent1"/>
-          </a:lnRef>
-          <a:fillRef idx="3">
-            <a:schemeClr val="accent1"/>
-          </a:fillRef>
-          <a:effectRef idx="2">
-            <a:schemeClr val="accent1"/>
-          </a:effectRef>
-          <a:fontRef idx="minor">
-            <a:schemeClr val="lt1"/>
-          </a:fontRef>
-        </p:style>
-        <p:txBody>
-          <a:bodyPr rtlCol="0" anchor="ctr" wrap="square"/>
-          <a:lstStyle/>
-          <a:p>
-            <a:pPr algn="ctr">
-              <a:defRPr sz="1000" b="1">
-                <a:solidFill>
-                  <a:srgbClr val="2C5E8A"/>
-                </a:solidFill>
-                <a:latin typeface="微軟正黑體"/>
-              </a:defRPr>
-            </a:pPr>
-            <a:r>
-              <a:t>長億南園 8 樓・房仲向屋主議價溝通簡報</a:t>
-            </a:r>
-          </a:p>
-        </p:txBody>
-      </p:sp>
-      <p:sp>
-        <p:nvSpPr>
-          <p:cNvPr id="5" name="TextBox 4"/>
+          <p:cNvPr id="3" name="TextBox 2"/>
           <p:cNvSpPr txBox="1"/>
           <p:nvPr/>
         </p:nvSpPr>
         <p:spPr>
           <a:xfrm>
-            <a:off x="731520" y="621792"/>
-            <a:ext cx="10698480" cy="594360"/>
+            <a:off x="731520" y="365760"/>
+            <a:ext cx="10728655" cy="822960"/>
           </a:xfrm>
           <a:prstGeom prst="rect">
             <a:avLst/>
@@ -8742,12 +7694,28 @@
           <a:noFill/>
         </p:spPr>
         <p:txBody>
-          <a:bodyPr wrap="square">
+          <a:bodyPr wrap="square" lIns="0" tIns="0" rIns="0" bIns="0">
             <a:spAutoFit/>
           </a:bodyPr>
           <a:lstStyle/>
           <a:p>
             <a:pPr>
+              <a:defRPr sz="1000" b="1">
+                <a:solidFill>
+                  <a:srgbClr val="D98C14"/>
+                </a:solidFill>
+                <a:latin typeface="微軟正黑體"/>
+              </a:defRPr>
+            </a:pPr>
+            <a:r>
+              <a:t>長億南園 8 樓・房仲向屋主議價溝通簡報</a:t>
+            </a:r>
+          </a:p>
+          <a:p>
+            <a:pPr>
+              <a:spcBef>
+                <a:spcPts val="200"/>
+              </a:spcBef>
               <a:defRPr sz="2000" b="1">
                 <a:solidFill>
                   <a:srgbClr val="1B365D"/>
@@ -8763,7 +7731,7 @@
       </p:sp>
       <p:sp>
         <p:nvSpPr>
-          <p:cNvPr id="6" name="Rounded Rectangle 5"/>
+          <p:cNvPr id="4" name="Rectangle 3"/>
           <p:cNvSpPr/>
           <p:nvPr/>
         </p:nvSpPr>
@@ -8772,7 +7740,7 @@
             <a:off x="731520" y="1371600"/>
             <a:ext cx="5212080" cy="4754880"/>
           </a:xfrm>
-          <a:prstGeom prst="roundRect">
+          <a:prstGeom prst="rect">
             <a:avLst/>
           </a:prstGeom>
           <a:solidFill>
@@ -8808,7 +7776,7 @@
       </p:sp>
       <p:sp>
         <p:nvSpPr>
-          <p:cNvPr id="7" name="TextBox 6"/>
+          <p:cNvPr id="5" name="TextBox 4"/>
           <p:cNvSpPr txBox="1"/>
           <p:nvPr/>
         </p:nvSpPr>
@@ -8875,7 +7843,7 @@
       </p:sp>
       <p:sp>
         <p:nvSpPr>
-          <p:cNvPr id="8" name="Rounded Rectangle 7"/>
+          <p:cNvPr id="6" name="Rectangle 5"/>
           <p:cNvSpPr/>
           <p:nvPr/>
         </p:nvSpPr>
@@ -8884,7 +7852,7 @@
             <a:off x="6217920" y="1371600"/>
             <a:ext cx="5212080" cy="4754880"/>
           </a:xfrm>
-          <a:prstGeom prst="roundRect">
+          <a:prstGeom prst="rect">
             <a:avLst/>
           </a:prstGeom>
           <a:solidFill>
@@ -8920,7 +7888,7 @@
       </p:sp>
       <p:sp>
         <p:nvSpPr>
-          <p:cNvPr id="9" name="TextBox 8"/>
+          <p:cNvPr id="7" name="TextBox 6"/>
           <p:cNvSpPr txBox="1"/>
           <p:nvPr/>
         </p:nvSpPr>
@@ -9048,112 +8016,14 @@
       </p:sp>
       <p:sp>
         <p:nvSpPr>
-          <p:cNvPr id="3" name="Rectangle 2"/>
-          <p:cNvSpPr/>
-          <p:nvPr/>
-        </p:nvSpPr>
-        <p:spPr>
-          <a:xfrm>
-            <a:off x="0" y="0"/>
-            <a:ext cx="12191695" cy="109728"/>
-          </a:xfrm>
-          <a:prstGeom prst="rect">
-            <a:avLst/>
-          </a:prstGeom>
-          <a:solidFill>
-            <a:srgbClr val="1B365D"/>
-          </a:solidFill>
-          <a:ln>
-            <a:noFill/>
-          </a:ln>
-        </p:spPr>
-        <p:style>
-          <a:lnRef idx="1">
-            <a:schemeClr val="accent1"/>
-          </a:lnRef>
-          <a:fillRef idx="3">
-            <a:schemeClr val="accent1"/>
-          </a:fillRef>
-          <a:effectRef idx="2">
-            <a:schemeClr val="accent1"/>
-          </a:effectRef>
-          <a:fontRef idx="minor">
-            <a:schemeClr val="lt1"/>
-          </a:fontRef>
-        </p:style>
-        <p:txBody>
-          <a:bodyPr rtlCol="0" anchor="ctr"/>
-          <a:lstStyle/>
-          <a:p>
-            <a:pPr algn="ctr"/>
-          </a:p>
-        </p:txBody>
-      </p:sp>
-      <p:sp>
-        <p:nvSpPr>
-          <p:cNvPr id="4" name="Rounded Rectangle 3"/>
-          <p:cNvSpPr/>
-          <p:nvPr/>
-        </p:nvSpPr>
-        <p:spPr>
-          <a:xfrm>
-            <a:off x="731520" y="320040"/>
-            <a:ext cx="4114800" cy="292608"/>
-          </a:xfrm>
-          <a:prstGeom prst="roundRect">
-            <a:avLst/>
-          </a:prstGeom>
-          <a:solidFill>
-            <a:srgbClr val="EAF2FA"/>
-          </a:solidFill>
-          <a:ln w="12700">
-            <a:solidFill>
-              <a:srgbClr val="2C5E8A"/>
-            </a:solidFill>
-          </a:ln>
-        </p:spPr>
-        <p:style>
-          <a:lnRef idx="1">
-            <a:schemeClr val="accent1"/>
-          </a:lnRef>
-          <a:fillRef idx="3">
-            <a:schemeClr val="accent1"/>
-          </a:fillRef>
-          <a:effectRef idx="2">
-            <a:schemeClr val="accent1"/>
-          </a:effectRef>
-          <a:fontRef idx="minor">
-            <a:schemeClr val="lt1"/>
-          </a:fontRef>
-        </p:style>
-        <p:txBody>
-          <a:bodyPr rtlCol="0" anchor="ctr" wrap="square"/>
-          <a:lstStyle/>
-          <a:p>
-            <a:pPr algn="ctr">
-              <a:defRPr sz="1000" b="1">
-                <a:solidFill>
-                  <a:srgbClr val="2C5E8A"/>
-                </a:solidFill>
-                <a:latin typeface="微軟正黑體"/>
-              </a:defRPr>
-            </a:pPr>
-            <a:r>
-              <a:t>長億南園 8 樓・房仲向屋主議價溝通簡報</a:t>
-            </a:r>
-          </a:p>
-        </p:txBody>
-      </p:sp>
-      <p:sp>
-        <p:nvSpPr>
-          <p:cNvPr id="5" name="TextBox 4"/>
+          <p:cNvPr id="3" name="TextBox 2"/>
           <p:cNvSpPr txBox="1"/>
           <p:nvPr/>
         </p:nvSpPr>
         <p:spPr>
           <a:xfrm>
-            <a:off x="731520" y="621792"/>
-            <a:ext cx="10698480" cy="594360"/>
+            <a:off x="731520" y="365760"/>
+            <a:ext cx="10728655" cy="822960"/>
           </a:xfrm>
           <a:prstGeom prst="rect">
             <a:avLst/>
@@ -9161,12 +8031,28 @@
           <a:noFill/>
         </p:spPr>
         <p:txBody>
-          <a:bodyPr wrap="square">
+          <a:bodyPr wrap="square" lIns="0" tIns="0" rIns="0" bIns="0">
             <a:spAutoFit/>
           </a:bodyPr>
           <a:lstStyle/>
           <a:p>
             <a:pPr>
+              <a:defRPr sz="1000" b="1">
+                <a:solidFill>
+                  <a:srgbClr val="D98C14"/>
+                </a:solidFill>
+                <a:latin typeface="微軟正黑體"/>
+              </a:defRPr>
+            </a:pPr>
+            <a:r>
+              <a:t>長億南園 8 樓・房仲向屋主議價溝通簡報</a:t>
+            </a:r>
+          </a:p>
+          <a:p>
+            <a:pPr>
+              <a:spcBef>
+                <a:spcPts val="200"/>
+              </a:spcBef>
               <a:defRPr sz="2000" b="1">
                 <a:solidFill>
                   <a:srgbClr val="1B365D"/>
@@ -9175,14 +8061,14 @@
               </a:defRPr>
             </a:pPr>
             <a:r>
-              <a:t>說服理由 6：買方曾租住南屯大墩人文有感情，信義房屋洽談中</a:t>
+              <a:t>說服理由 6：買方曾租住南屯大墩人文有感情，信義房屋正積極洽談中</a:t>
             </a:r>
           </a:p>
         </p:txBody>
       </p:sp>
       <p:graphicFrame>
         <p:nvGraphicFramePr>
-          <p:cNvPr id="6" name="Table 5"/>
+          <p:cNvPr id="4" name="Table 3"/>
           <p:cNvGraphicFramePr>
             <a:graphicFrameLocks noGrp="1"/>
           </p:cNvGraphicFramePr>
@@ -9242,7 +8128,7 @@
                         </a:defRPr>
                       </a:pPr>
                       <a:r>
-                        <a:t>南屯區【大墩人文】(約 188 戶・信義洽談中)</a:t>
+                        <a:t>南屯區【大墩人文】(約 188 戶・信義積極洽談中)</a:t>
                       </a:r>
                     </a:p>
                   </a:txBody>
@@ -9464,7 +8350,7 @@
                         </a:defRPr>
                       </a:pPr>
                       <a:r>
-                        <a:t>正三房格局，全社區約 188 戶規模適中，質感佳。</a:t>
+                        <a:t>正三房格局，全社區約 188 戶規模適中，質感佳，室內達 31.5 坪滿意度高。</a:t>
                       </a:r>
                     </a:p>
                   </a:txBody>
@@ -9579,7 +8465,7 @@
       </p:graphicFrame>
       <p:sp>
         <p:nvSpPr>
-          <p:cNvPr id="7" name="TextBox 6"/>
+          <p:cNvPr id="5" name="TextBox 4"/>
           <p:cNvSpPr txBox="1"/>
           <p:nvPr/>
         </p:nvSpPr>
